--- a/발표/[CODE]_서브웨이_본선발표.pptx
+++ b/발표/[CODE]_서브웨이_본선발표.pptx
@@ -180,7 +180,7 @@
             <c:bubble3D val="0"/>
             <c:extLst>
               <c:ext xmlns:c16="http://schemas.microsoft.com/office/drawing/2014/chart" uri="{C3380CC4-5D6E-409C-BE32-E72D297353CC}">
-                <c16:uniqueId val="{00000001-C1CD-44DB-8ED3-E08DA787819A}"/>
+                <c16:uniqueId val="{00000001-AE46-4E19-9B73-EA932D60F464}"/>
               </c:ext>
             </c:extLst>
           </c:dPt>
@@ -190,7 +190,7 @@
             <c:bubble3D val="0"/>
             <c:extLst>
               <c:ext xmlns:c16="http://schemas.microsoft.com/office/drawing/2014/chart" uri="{C3380CC4-5D6E-409C-BE32-E72D297353CC}">
-                <c16:uniqueId val="{00000003-C1CD-44DB-8ED3-E08DA787819A}"/>
+                <c16:uniqueId val="{00000003-AE46-4E19-9B73-EA932D60F464}"/>
               </c:ext>
             </c:extLst>
           </c:dPt>
@@ -200,7 +200,7 @@
             <c:bubble3D val="0"/>
             <c:extLst>
               <c:ext xmlns:c16="http://schemas.microsoft.com/office/drawing/2014/chart" uri="{C3380CC4-5D6E-409C-BE32-E72D297353CC}">
-                <c16:uniqueId val="{00000005-C1CD-44DB-8ED3-E08DA787819A}"/>
+                <c16:uniqueId val="{00000005-AE46-4E19-9B73-EA932D60F464}"/>
               </c:ext>
             </c:extLst>
           </c:dPt>
@@ -210,7 +210,7 @@
             <c:bubble3D val="0"/>
             <c:extLst>
               <c:ext xmlns:c16="http://schemas.microsoft.com/office/drawing/2014/chart" uri="{C3380CC4-5D6E-409C-BE32-E72D297353CC}">
-                <c16:uniqueId val="{00000007-C1CD-44DB-8ED3-E08DA787819A}"/>
+                <c16:uniqueId val="{00000007-AE46-4E19-9B73-EA932D60F464}"/>
               </c:ext>
             </c:extLst>
           </c:dPt>
@@ -220,7 +220,7 @@
             <c:bubble3D val="0"/>
             <c:extLst>
               <c:ext xmlns:c16="http://schemas.microsoft.com/office/drawing/2014/chart" uri="{C3380CC4-5D6E-409C-BE32-E72D297353CC}">
-                <c16:uniqueId val="{00000009-C1CD-44DB-8ED3-E08DA787819A}"/>
+                <c16:uniqueId val="{00000009-AE46-4E19-9B73-EA932D60F464}"/>
               </c:ext>
             </c:extLst>
           </c:dPt>
@@ -230,7 +230,7 @@
             <c:bubble3D val="0"/>
             <c:extLst>
               <c:ext xmlns:c16="http://schemas.microsoft.com/office/drawing/2014/chart" uri="{C3380CC4-5D6E-409C-BE32-E72D297353CC}">
-                <c16:uniqueId val="{0000000B-C1CD-44DB-8ED3-E08DA787819A}"/>
+                <c16:uniqueId val="{0000000B-AE46-4E19-9B73-EA932D60F464}"/>
               </c:ext>
             </c:extLst>
           </c:dPt>
@@ -240,7 +240,7 @@
             <c:bubble3D val="0"/>
             <c:extLst>
               <c:ext xmlns:c16="http://schemas.microsoft.com/office/drawing/2014/chart" uri="{C3380CC4-5D6E-409C-BE32-E72D297353CC}">
-                <c16:uniqueId val="{0000000D-C1CD-44DB-8ED3-E08DA787819A}"/>
+                <c16:uniqueId val="{0000000D-AE46-4E19-9B73-EA932D60F464}"/>
               </c:ext>
             </c:extLst>
           </c:dPt>
@@ -250,7 +250,7 @@
             <c:bubble3D val="0"/>
             <c:extLst>
               <c:ext xmlns:c16="http://schemas.microsoft.com/office/drawing/2014/chart" uri="{C3380CC4-5D6E-409C-BE32-E72D297353CC}">
-                <c16:uniqueId val="{0000000F-C1CD-44DB-8ED3-E08DA787819A}"/>
+                <c16:uniqueId val="{0000000F-AE46-4E19-9B73-EA932D60F464}"/>
               </c:ext>
             </c:extLst>
           </c:dPt>
@@ -260,7 +260,7 @@
             <c:bubble3D val="0"/>
             <c:extLst>
               <c:ext xmlns:c16="http://schemas.microsoft.com/office/drawing/2014/chart" uri="{C3380CC4-5D6E-409C-BE32-E72D297353CC}">
-                <c16:uniqueId val="{00000011-C1CD-44DB-8ED3-E08DA787819A}"/>
+                <c16:uniqueId val="{00000011-AE46-4E19-9B73-EA932D60F464}"/>
               </c:ext>
             </c:extLst>
           </c:dPt>
@@ -276,7 +276,7 @@
             </c:spPr>
             <c:extLst>
               <c:ext xmlns:c16="http://schemas.microsoft.com/office/drawing/2014/chart" uri="{C3380CC4-5D6E-409C-BE32-E72D297353CC}">
-                <c16:uniqueId val="{00000013-C1CD-44DB-8ED3-E08DA787819A}"/>
+                <c16:uniqueId val="{00000013-AE46-4E19-9B73-EA932D60F464}"/>
               </c:ext>
             </c:extLst>
           </c:dPt>
@@ -292,7 +292,7 @@
             </c:spPr>
             <c:extLst>
               <c:ext xmlns:c16="http://schemas.microsoft.com/office/drawing/2014/chart" uri="{C3380CC4-5D6E-409C-BE32-E72D297353CC}">
-                <c16:uniqueId val="{00000015-C1CD-44DB-8ED3-E08DA787819A}"/>
+                <c16:uniqueId val="{00000015-AE46-4E19-9B73-EA932D60F464}"/>
               </c:ext>
             </c:extLst>
           </c:dPt>
@@ -418,7 +418,7 @@
           </c:val>
           <c:extLst>
             <c:ext xmlns:c16="http://schemas.microsoft.com/office/drawing/2014/chart" uri="{C3380CC4-5D6E-409C-BE32-E72D297353CC}">
-              <c16:uniqueId val="{00000016-C1CD-44DB-8ED3-E08DA787819A}"/>
+              <c16:uniqueId val="{00000016-AE46-4E19-9B73-EA932D60F464}"/>
             </c:ext>
           </c:extLst>
         </c:ser>
@@ -594,7 +594,7 @@
             <c:bubble3D val="0"/>
             <c:extLst>
               <c:ext xmlns:c16="http://schemas.microsoft.com/office/drawing/2014/chart" uri="{C3380CC4-5D6E-409C-BE32-E72D297353CC}">
-                <c16:uniqueId val="{00000001-149B-4388-8F0A-B84B6DBF6637}"/>
+                <c16:uniqueId val="{00000001-27AD-4667-82F2-B45EBA51D9E7}"/>
               </c:ext>
             </c:extLst>
           </c:dPt>
@@ -610,7 +610,7 @@
             </c:spPr>
             <c:extLst>
               <c:ext xmlns:c16="http://schemas.microsoft.com/office/drawing/2014/chart" uri="{C3380CC4-5D6E-409C-BE32-E72D297353CC}">
-                <c16:uniqueId val="{00000003-149B-4388-8F0A-B84B6DBF6637}"/>
+                <c16:uniqueId val="{00000003-27AD-4667-82F2-B45EBA51D9E7}"/>
               </c:ext>
             </c:extLst>
           </c:dPt>
@@ -660,7 +660,7 @@
                   <c:v>배포 데이터 (봉인 500장)</c:v>
                 </c:pt>
                 <c:pt idx="1">
-                  <c:v>직접 촬영 (약점 유형)</c:v>
+                  <c:v>직접 촬영 (새 사진 389장)</c:v>
                 </c:pt>
               </c:strCache>
             </c:strRef>
@@ -675,14 +675,14 @@
                   <c:v>86.2</c:v>
                 </c:pt>
                 <c:pt idx="1">
-                  <c:v>45.2</c:v>
+                  <c:v>52.4</c:v>
                 </c:pt>
               </c:numCache>
             </c:numRef>
           </c:val>
           <c:extLst>
             <c:ext xmlns:c16="http://schemas.microsoft.com/office/drawing/2014/chart" uri="{C3380CC4-5D6E-409C-BE32-E72D297353CC}">
-              <c16:uniqueId val="{00000004-149B-4388-8F0A-B84B6DBF6637}"/>
+              <c16:uniqueId val="{00000004-27AD-4667-82F2-B45EBA51D9E7}"/>
             </c:ext>
           </c:extLst>
         </c:ser>
@@ -807,7 +807,7 @@
     </p:spTree>
     <p:extLst>
       <p:ext uri="{BB962C8B-B14F-4D97-AF65-F5344CB8AC3E}">
-        <p14:creationId xmlns:p14="http://schemas.microsoft.com/office/powerpoint/2010/main" val="1988172688"/>
+        <p14:creationId xmlns:p14="http://schemas.microsoft.com/office/powerpoint/2010/main" val="1931830149"/>
       </p:ext>
     </p:extLst>
   </p:cSld>
@@ -1736,7 +1736,7 @@
           <a:p>
             <a:r>
               <a:rPr lang="en-US" dirty="0"/>
-              <a:t>한계를 말씀드리겠습니다. 저희는 86퍼센트라는 숫자를 그대로 믿지 않았습니다. 오답이 몰린 유형, 즉 도트 인쇄와 각인, 두 날짜 병기만 골라서 팀원들이 편의점에서 직접 사진을 찍었고, 모델이 한 번도 본 적 없는 그 사진에 돌렸더니 45퍼센트가 나왔습니다. 약점의 실제 크기는 이만큼입니다. 남은 오답은 규칙이 아니라 인식 품질의 문제라서, 촬영 단계에서 날짜를 가까이 찍게 안내하고, 못 읽은 날짜 줄을 사람이 골라 재학습하는 방향으로 보완합니다.</a:t>
+              <a:t>한계를 말씀드리겠습니다. 저희는 86퍼센트라는 숫자를 그대로 믿지 않았습니다. 오답이 몰린 도트 인쇄, 각인, 두 날짜 병기 위주로 팀원 네 명이 편의점에서 389장을 직접 찍었고, 모델이 한 번도 본 적 없는 그 사진에 돌렸더니 52퍼센트, 미인식이 22퍼센트였습니다. 찍은 사람에 따라 44에서 70퍼센트까지 갈렸습니다. 약점의 실제 크기는 이만큼입니다. 남은 오답은 규칙이 아니라 인식 품질의 문제라서, 촬영 단계에서 날짜를 가까이 찍게 안내하고, 못 읽은 날짜 줄을 사람이 골라 재학습하는 방향으로 보완합니다.</a:t>
             </a:r>
           </a:p>
         </p:txBody>
@@ -14762,7 +14762,7 @@
                 <a:ea typeface="Pretendard SemiBold" pitchFamily="34" charset="-122"/>
                 <a:cs typeface="Pretendard SemiBold" pitchFamily="34" charset="-120"/>
               </a:rPr>
-              <a:t>약점만 모은 새 시험지에서는 45%</a:t>
+              <a:t>직접 찍은 새 사진에서는 52%</a:t>
             </a:r>
             <a:endParaRPr lang="en-US" sz="1900" dirty="0"/>
           </a:p>
@@ -14890,7 +14890,7 @@
                 <a:ea typeface="Pretendard SemiBold" pitchFamily="34" charset="-122"/>
                 <a:cs typeface="Pretendard SemiBold" pitchFamily="34" charset="-120"/>
               </a:rPr>
-              <a:t>직접 촬영 166장 (도트·각인·병기만)</a:t>
+              <a:t>직접 촬영 389장 (팀원 4명, 약점 유형 위주)</a:t>
             </a:r>
             <a:endParaRPr lang="en-US" sz="1200" dirty="0"/>
           </a:p>
@@ -15588,7 +15588,7 @@
                 <a:ea typeface="Pretendard SemiBold" pitchFamily="34" charset="-122"/>
                 <a:cs typeface="Pretendard SemiBold" pitchFamily="34" charset="-120"/>
               </a:rPr>
-              <a:t>86% 는 쉬운 사진이 섞인 평균이다. </a:t>
+              <a:t>새 사진은 찍은 사람에 따라 </a:t>
             </a:r>
             <a:r>
               <a:rPr lang="en-US" sz="1250" dirty="0">
@@ -15599,7 +15599,7 @@
                 <a:ea typeface="Pretendard SemiBold" pitchFamily="34" charset="-122"/>
                 <a:cs typeface="Pretendard SemiBold" pitchFamily="34" charset="-120"/>
               </a:rPr>
-              <a:t>약점의 실제 크기를 따로 재서 공개</a:t>
+              <a:t>44 ~ 70%</a:t>
             </a:r>
             <a:r>
               <a:rPr lang="en-US" sz="1250" dirty="0">
@@ -15610,7 +15610,7 @@
                 <a:ea typeface="Pretendard SemiBold" pitchFamily="34" charset="-122"/>
                 <a:cs typeface="Pretendard SemiBold" pitchFamily="34" charset="-120"/>
               </a:rPr>
-              <a:t> 한다</a:t>
+              <a:t> : 무엇을 어떻게 찍느냐가 정확도를 크게 좌우한다</a:t>
             </a:r>
             <a:endParaRPr lang="en-US" sz="1250" dirty="0"/>
           </a:p>
@@ -22793,7 +22793,7 @@
                           <a:ea typeface="Pretendard SemiBold" pitchFamily="34" charset="-122"/>
                           <a:cs typeface="Pretendard SemiBold" pitchFamily="34" charset="-120"/>
                         </a:rPr>
-                        <a:t>직접 촬영 166장</a:t>
+                        <a:t>직접 촬영 389장</a:t>
                       </a:r>
                       <a:endParaRPr lang="en-US" sz="1000" dirty="0">
                         <a:latin typeface="Pretendard SemiBold" charset="0"/>
@@ -22929,7 +22929,7 @@
                           <a:ea typeface="Pretendard SemiBold" pitchFamily="34" charset="-122"/>
                           <a:cs typeface="Pretendard SemiBold" pitchFamily="34" charset="-120"/>
                         </a:rPr>
-                        <a:t>45.2%</a:t>
+                        <a:t>52.4%</a:t>
                       </a:r>
                       <a:endParaRPr lang="en-US" sz="1000" dirty="0">
                         <a:latin typeface="Pretendard SemiBold" charset="0"/>
@@ -22997,7 +22997,7 @@
                           <a:ea typeface="Pretendard SemiBold" pitchFamily="34" charset="-122"/>
                           <a:cs typeface="Pretendard SemiBold" pitchFamily="34" charset="-120"/>
                         </a:rPr>
-                        <a:t>59.0%</a:t>
+                        <a:t>62.8%</a:t>
                       </a:r>
                       <a:endParaRPr lang="en-US" sz="1000" dirty="0">
                         <a:latin typeface="Pretendard SemiBold" charset="0"/>
@@ -23065,7 +23065,7 @@
                           <a:ea typeface="Pretendard SemiBold" pitchFamily="34" charset="-122"/>
                           <a:cs typeface="Pretendard SemiBold" pitchFamily="34" charset="-120"/>
                         </a:rPr>
-                        <a:t>약점 유형만, 미인식 23%</a:t>
+                        <a:t>약점 유형 위주, 미인식 22%</a:t>
                       </a:r>
                       <a:endParaRPr lang="en-US" sz="1000" dirty="0">
                         <a:latin typeface="Pretendard SemiBold" charset="0"/>
@@ -24915,7 +24915,7 @@
                 <a:ea typeface="Pretendard SemiBold" pitchFamily="34" charset="-122"/>
                 <a:cs typeface="Pretendard SemiBold" pitchFamily="34" charset="-120"/>
               </a:rPr>
-              <a:t>도트 인쇄·각인·두 날짜 병기 위주 494장 촬영, 389장 라벨링. 한 번도 본 적 없는 시험지로 사용</a:t>
+              <a:t>도트 인쇄·각인·두 날짜 병기 위주 489장 촬영, 389장 라벨링. 한 번도 본 적 없는 시험지로 사용</a:t>
             </a:r>
             <a:endParaRPr lang="en-US" sz="1100" dirty="0"/>
           </a:p>

--- a/발표/[CODE]_서브웨이_본선발표.pptx
+++ b/발표/[CODE]_서브웨이_본선발표.pptx
@@ -180,7 +180,7 @@
             <c:bubble3D val="0"/>
             <c:extLst>
               <c:ext xmlns:c16="http://schemas.microsoft.com/office/drawing/2014/chart" uri="{C3380CC4-5D6E-409C-BE32-E72D297353CC}">
-                <c16:uniqueId val="{00000001-AE46-4E19-9B73-EA932D60F464}"/>
+                <c16:uniqueId val="{00000001-3C60-4441-B0EE-7CAECF3FD172}"/>
               </c:ext>
             </c:extLst>
           </c:dPt>
@@ -190,7 +190,7 @@
             <c:bubble3D val="0"/>
             <c:extLst>
               <c:ext xmlns:c16="http://schemas.microsoft.com/office/drawing/2014/chart" uri="{C3380CC4-5D6E-409C-BE32-E72D297353CC}">
-                <c16:uniqueId val="{00000003-AE46-4E19-9B73-EA932D60F464}"/>
+                <c16:uniqueId val="{00000003-3C60-4441-B0EE-7CAECF3FD172}"/>
               </c:ext>
             </c:extLst>
           </c:dPt>
@@ -200,7 +200,7 @@
             <c:bubble3D val="0"/>
             <c:extLst>
               <c:ext xmlns:c16="http://schemas.microsoft.com/office/drawing/2014/chart" uri="{C3380CC4-5D6E-409C-BE32-E72D297353CC}">
-                <c16:uniqueId val="{00000005-AE46-4E19-9B73-EA932D60F464}"/>
+                <c16:uniqueId val="{00000005-3C60-4441-B0EE-7CAECF3FD172}"/>
               </c:ext>
             </c:extLst>
           </c:dPt>
@@ -210,7 +210,7 @@
             <c:bubble3D val="0"/>
             <c:extLst>
               <c:ext xmlns:c16="http://schemas.microsoft.com/office/drawing/2014/chart" uri="{C3380CC4-5D6E-409C-BE32-E72D297353CC}">
-                <c16:uniqueId val="{00000007-AE46-4E19-9B73-EA932D60F464}"/>
+                <c16:uniqueId val="{00000007-3C60-4441-B0EE-7CAECF3FD172}"/>
               </c:ext>
             </c:extLst>
           </c:dPt>
@@ -220,7 +220,7 @@
             <c:bubble3D val="0"/>
             <c:extLst>
               <c:ext xmlns:c16="http://schemas.microsoft.com/office/drawing/2014/chart" uri="{C3380CC4-5D6E-409C-BE32-E72D297353CC}">
-                <c16:uniqueId val="{00000009-AE46-4E19-9B73-EA932D60F464}"/>
+                <c16:uniqueId val="{00000009-3C60-4441-B0EE-7CAECF3FD172}"/>
               </c:ext>
             </c:extLst>
           </c:dPt>
@@ -230,7 +230,7 @@
             <c:bubble3D val="0"/>
             <c:extLst>
               <c:ext xmlns:c16="http://schemas.microsoft.com/office/drawing/2014/chart" uri="{C3380CC4-5D6E-409C-BE32-E72D297353CC}">
-                <c16:uniqueId val="{0000000B-AE46-4E19-9B73-EA932D60F464}"/>
+                <c16:uniqueId val="{0000000B-3C60-4441-B0EE-7CAECF3FD172}"/>
               </c:ext>
             </c:extLst>
           </c:dPt>
@@ -240,7 +240,7 @@
             <c:bubble3D val="0"/>
             <c:extLst>
               <c:ext xmlns:c16="http://schemas.microsoft.com/office/drawing/2014/chart" uri="{C3380CC4-5D6E-409C-BE32-E72D297353CC}">
-                <c16:uniqueId val="{0000000D-AE46-4E19-9B73-EA932D60F464}"/>
+                <c16:uniqueId val="{0000000D-3C60-4441-B0EE-7CAECF3FD172}"/>
               </c:ext>
             </c:extLst>
           </c:dPt>
@@ -250,7 +250,7 @@
             <c:bubble3D val="0"/>
             <c:extLst>
               <c:ext xmlns:c16="http://schemas.microsoft.com/office/drawing/2014/chart" uri="{C3380CC4-5D6E-409C-BE32-E72D297353CC}">
-                <c16:uniqueId val="{0000000F-AE46-4E19-9B73-EA932D60F464}"/>
+                <c16:uniqueId val="{0000000F-3C60-4441-B0EE-7CAECF3FD172}"/>
               </c:ext>
             </c:extLst>
           </c:dPt>
@@ -260,7 +260,7 @@
             <c:bubble3D val="0"/>
             <c:extLst>
               <c:ext xmlns:c16="http://schemas.microsoft.com/office/drawing/2014/chart" uri="{C3380CC4-5D6E-409C-BE32-E72D297353CC}">
-                <c16:uniqueId val="{00000011-AE46-4E19-9B73-EA932D60F464}"/>
+                <c16:uniqueId val="{00000011-3C60-4441-B0EE-7CAECF3FD172}"/>
               </c:ext>
             </c:extLst>
           </c:dPt>
@@ -276,7 +276,7 @@
             </c:spPr>
             <c:extLst>
               <c:ext xmlns:c16="http://schemas.microsoft.com/office/drawing/2014/chart" uri="{C3380CC4-5D6E-409C-BE32-E72D297353CC}">
-                <c16:uniqueId val="{00000013-AE46-4E19-9B73-EA932D60F464}"/>
+                <c16:uniqueId val="{00000013-3C60-4441-B0EE-7CAECF3FD172}"/>
               </c:ext>
             </c:extLst>
           </c:dPt>
@@ -292,7 +292,7 @@
             </c:spPr>
             <c:extLst>
               <c:ext xmlns:c16="http://schemas.microsoft.com/office/drawing/2014/chart" uri="{C3380CC4-5D6E-409C-BE32-E72D297353CC}">
-                <c16:uniqueId val="{00000015-AE46-4E19-9B73-EA932D60F464}"/>
+                <c16:uniqueId val="{00000015-3C60-4441-B0EE-7CAECF3FD172}"/>
               </c:ext>
             </c:extLst>
           </c:dPt>
@@ -418,7 +418,7 @@
           </c:val>
           <c:extLst>
             <c:ext xmlns:c16="http://schemas.microsoft.com/office/drawing/2014/chart" uri="{C3380CC4-5D6E-409C-BE32-E72D297353CC}">
-              <c16:uniqueId val="{00000016-AE46-4E19-9B73-EA932D60F464}"/>
+              <c16:uniqueId val="{00000016-3C60-4441-B0EE-7CAECF3FD172}"/>
             </c:ext>
           </c:extLst>
         </c:ser>
@@ -594,7 +594,7 @@
             <c:bubble3D val="0"/>
             <c:extLst>
               <c:ext xmlns:c16="http://schemas.microsoft.com/office/drawing/2014/chart" uri="{C3380CC4-5D6E-409C-BE32-E72D297353CC}">
-                <c16:uniqueId val="{00000001-27AD-4667-82F2-B45EBA51D9E7}"/>
+                <c16:uniqueId val="{00000001-6593-42C6-81A8-32CC75542433}"/>
               </c:ext>
             </c:extLst>
           </c:dPt>
@@ -610,7 +610,7 @@
             </c:spPr>
             <c:extLst>
               <c:ext xmlns:c16="http://schemas.microsoft.com/office/drawing/2014/chart" uri="{C3380CC4-5D6E-409C-BE32-E72D297353CC}">
-                <c16:uniqueId val="{00000003-27AD-4667-82F2-B45EBA51D9E7}"/>
+                <c16:uniqueId val="{00000003-6593-42C6-81A8-32CC75542433}"/>
               </c:ext>
             </c:extLst>
           </c:dPt>
@@ -682,7 +682,7 @@
           </c:val>
           <c:extLst>
             <c:ext xmlns:c16="http://schemas.microsoft.com/office/drawing/2014/chart" uri="{C3380CC4-5D6E-409C-BE32-E72D297353CC}">
-              <c16:uniqueId val="{00000004-27AD-4667-82F2-B45EBA51D9E7}"/>
+              <c16:uniqueId val="{00000004-6593-42C6-81A8-32CC75542433}"/>
             </c:ext>
           </c:extLst>
         </c:ser>
@@ -807,7 +807,7 @@
     </p:spTree>
     <p:extLst>
       <p:ext uri="{BB962C8B-B14F-4D97-AF65-F5344CB8AC3E}">
-        <p14:creationId xmlns:p14="http://schemas.microsoft.com/office/powerpoint/2010/main" val="1931830149"/>
+        <p14:creationId xmlns:p14="http://schemas.microsoft.com/office/powerpoint/2010/main" val="3023156796"/>
       </p:ext>
     </p:extLst>
   </p:cSld>
@@ -1127,7 +1127,7 @@
           <a:p>
             <a:r>
               <a:rPr lang="en-US" dirty="0"/>
-              <a:t>결과입니다. 처음 39%에서 출발해서 예선 제출 때 84.2%, 본선 통합본은 봉인 500장에서 86.2%입니다. 연월일을 따로 채점하는 필드 평균으로는 90.8%입니다. 가장 큰 도약은 탐지기와 인식기를 교체한 구간인데, 속도 때문에 한 결정이 정확도까지 올린 경우입니다. 튜닝에 쓴 2,852장에서는 82.3에서 86.0으로 올랐고, 한 번도 보지 않은 봉인 셋에서도 같이 올랐기 때문에 튜닝 셋에 과적합된 상승이 아니라고 판단합니다.</a:t>
+              <a:t>결과입니다. 처음 39%에서 출발해서 예선 제출 때 84.2%, 본선 통합본은 봉인 500장에서 86.2%입니다. 연월일을 따로 채점하는 필드 평균으로는 90.8%입니다. 가장 큰 도약은 탐지기와 인식기를 교체한 구간인데, 속도 때문에 한 결정이 정확도까지 올린 경우입니다. 튜닝에 쓴 2,852장에서는 82.3에서 86.7로 올랐고, 한 번도 보지 않은 봉인 셋에서도 같이 올랐기 때문에 튜닝 셋에 과적합된 상승이 아니라고 판단합니다.</a:t>
             </a:r>
           </a:p>
         </p:txBody>
@@ -5114,7 +5114,7 @@
                 <a:ea typeface="Pretendard SemiBold" pitchFamily="34" charset="-122"/>
                 <a:cs typeface="Pretendard SemiBold" pitchFamily="34" charset="-120"/>
               </a:rPr>
-              <a:t>82.3 → 86.0%</a:t>
+              <a:t>82.3 → 86.7%</a:t>
             </a:r>
             <a:r>
               <a:rPr lang="en-US" sz="1250" dirty="0">
@@ -7671,7 +7671,7 @@
                           <a:ea typeface="Pretendard SemiBold" pitchFamily="34" charset="-122"/>
                           <a:cs typeface="Pretendard SemiBold" pitchFamily="34" charset="-120"/>
                         </a:rPr>
-                        <a:t>+14 / −1 → 최신 규칙 위 0 / 0</a:t>
+                        <a:t>+14 / −1 → 최신 규칙 위 +7 / −2</a:t>
                       </a:r>
                       <a:endParaRPr lang="en-US" sz="980" dirty="0">
                         <a:latin typeface="Pretendard SemiBold" charset="0"/>
@@ -7739,7 +7739,7 @@
                           <a:ea typeface="Pretendard SemiBold" pitchFamily="34" charset="-122"/>
                           <a:cs typeface="Pretendard SemiBold" pitchFamily="34" charset="-120"/>
                         </a:rPr>
-                        <a:t>보류</a:t>
+                        <a:t>기본 끔</a:t>
                       </a:r>
                       <a:endParaRPr lang="en-US" sz="980" dirty="0">
                         <a:latin typeface="Pretendard SemiBold" charset="0"/>
@@ -7807,7 +7807,7 @@
                           <a:ea typeface="Pretendard SemiBold" pitchFamily="34" charset="-122"/>
                           <a:cs typeface="Pretendard SemiBold" pitchFamily="34" charset="-120"/>
                         </a:rPr>
-                        <a:t>시간 +18%, 기여가 사라짐</a:t>
+                        <a:t>5장보다 시간 여유 (장당 +0.3~0.7초)</a:t>
                       </a:r>
                       <a:endParaRPr lang="en-US" sz="980" dirty="0">
                         <a:latin typeface="Pretendard SemiBold" charset="0"/>
@@ -22178,7 +22178,7 @@
                           <a:ea typeface="Pretendard SemiBold" pitchFamily="34" charset="-122"/>
                           <a:cs typeface="Pretendard SemiBold" pitchFamily="34" charset="-120"/>
                         </a:rPr>
-                        <a:t>본선 규칙 + 한국어 2차 의견</a:t>
+                        <a:t>본선 최종 (한국어 2차 의견 끔)</a:t>
                       </a:r>
                       <a:endParaRPr lang="en-US" sz="1000" dirty="0">
                         <a:latin typeface="Pretendard SemiBold" charset="0"/>
@@ -22246,7 +22246,7 @@
                           <a:ea typeface="Pretendard SemiBold" pitchFamily="34" charset="-122"/>
                           <a:cs typeface="Pretendard SemiBold" pitchFamily="34" charset="-120"/>
                         </a:rPr>
-                        <a:t>86.0%</a:t>
+                        <a:t>86.7%</a:t>
                       </a:r>
                       <a:endParaRPr lang="en-US" sz="1000" dirty="0">
                         <a:latin typeface="Pretendard SemiBold" charset="0"/>
@@ -22371,7 +22371,7 @@
                           <a:ea typeface="Pretendard SemiBold" pitchFamily="34" charset="-122"/>
                           <a:cs typeface="Pretendard SemiBold" pitchFamily="34" charset="-120"/>
                         </a:rPr>
-                        <a:t>라벨 점검 후, 병기 77.9%</a:t>
+                        <a:t>라벨 점검 후, 병기 78.3%</a:t>
                       </a:r>
                       <a:endParaRPr lang="en-US" sz="1000" dirty="0">
                         <a:latin typeface="Pretendard SemiBold" charset="0"/>

--- a/발표/[CODE]_서브웨이_본선발표.pptx
+++ b/발표/[CODE]_서브웨이_본선발표.pptx
@@ -180,7 +180,7 @@
             <c:bubble3D val="0"/>
             <c:extLst>
               <c:ext xmlns:c16="http://schemas.microsoft.com/office/drawing/2014/chart" uri="{C3380CC4-5D6E-409C-BE32-E72D297353CC}">
-                <c16:uniqueId val="{00000001-3C60-4441-B0EE-7CAECF3FD172}"/>
+                <c16:uniqueId val="{00000001-0290-4377-9707-2E9A9D4400B0}"/>
               </c:ext>
             </c:extLst>
           </c:dPt>
@@ -190,7 +190,7 @@
             <c:bubble3D val="0"/>
             <c:extLst>
               <c:ext xmlns:c16="http://schemas.microsoft.com/office/drawing/2014/chart" uri="{C3380CC4-5D6E-409C-BE32-E72D297353CC}">
-                <c16:uniqueId val="{00000003-3C60-4441-B0EE-7CAECF3FD172}"/>
+                <c16:uniqueId val="{00000003-0290-4377-9707-2E9A9D4400B0}"/>
               </c:ext>
             </c:extLst>
           </c:dPt>
@@ -200,7 +200,7 @@
             <c:bubble3D val="0"/>
             <c:extLst>
               <c:ext xmlns:c16="http://schemas.microsoft.com/office/drawing/2014/chart" uri="{C3380CC4-5D6E-409C-BE32-E72D297353CC}">
-                <c16:uniqueId val="{00000005-3C60-4441-B0EE-7CAECF3FD172}"/>
+                <c16:uniqueId val="{00000005-0290-4377-9707-2E9A9D4400B0}"/>
               </c:ext>
             </c:extLst>
           </c:dPt>
@@ -210,7 +210,7 @@
             <c:bubble3D val="0"/>
             <c:extLst>
               <c:ext xmlns:c16="http://schemas.microsoft.com/office/drawing/2014/chart" uri="{C3380CC4-5D6E-409C-BE32-E72D297353CC}">
-                <c16:uniqueId val="{00000007-3C60-4441-B0EE-7CAECF3FD172}"/>
+                <c16:uniqueId val="{00000007-0290-4377-9707-2E9A9D4400B0}"/>
               </c:ext>
             </c:extLst>
           </c:dPt>
@@ -220,7 +220,7 @@
             <c:bubble3D val="0"/>
             <c:extLst>
               <c:ext xmlns:c16="http://schemas.microsoft.com/office/drawing/2014/chart" uri="{C3380CC4-5D6E-409C-BE32-E72D297353CC}">
-                <c16:uniqueId val="{00000009-3C60-4441-B0EE-7CAECF3FD172}"/>
+                <c16:uniqueId val="{00000009-0290-4377-9707-2E9A9D4400B0}"/>
               </c:ext>
             </c:extLst>
           </c:dPt>
@@ -230,7 +230,7 @@
             <c:bubble3D val="0"/>
             <c:extLst>
               <c:ext xmlns:c16="http://schemas.microsoft.com/office/drawing/2014/chart" uri="{C3380CC4-5D6E-409C-BE32-E72D297353CC}">
-                <c16:uniqueId val="{0000000B-3C60-4441-B0EE-7CAECF3FD172}"/>
+                <c16:uniqueId val="{0000000B-0290-4377-9707-2E9A9D4400B0}"/>
               </c:ext>
             </c:extLst>
           </c:dPt>
@@ -240,7 +240,7 @@
             <c:bubble3D val="0"/>
             <c:extLst>
               <c:ext xmlns:c16="http://schemas.microsoft.com/office/drawing/2014/chart" uri="{C3380CC4-5D6E-409C-BE32-E72D297353CC}">
-                <c16:uniqueId val="{0000000D-3C60-4441-B0EE-7CAECF3FD172}"/>
+                <c16:uniqueId val="{0000000D-0290-4377-9707-2E9A9D4400B0}"/>
               </c:ext>
             </c:extLst>
           </c:dPt>
@@ -250,7 +250,7 @@
             <c:bubble3D val="0"/>
             <c:extLst>
               <c:ext xmlns:c16="http://schemas.microsoft.com/office/drawing/2014/chart" uri="{C3380CC4-5D6E-409C-BE32-E72D297353CC}">
-                <c16:uniqueId val="{0000000F-3C60-4441-B0EE-7CAECF3FD172}"/>
+                <c16:uniqueId val="{0000000F-0290-4377-9707-2E9A9D4400B0}"/>
               </c:ext>
             </c:extLst>
           </c:dPt>
@@ -260,7 +260,7 @@
             <c:bubble3D val="0"/>
             <c:extLst>
               <c:ext xmlns:c16="http://schemas.microsoft.com/office/drawing/2014/chart" uri="{C3380CC4-5D6E-409C-BE32-E72D297353CC}">
-                <c16:uniqueId val="{00000011-3C60-4441-B0EE-7CAECF3FD172}"/>
+                <c16:uniqueId val="{00000011-0290-4377-9707-2E9A9D4400B0}"/>
               </c:ext>
             </c:extLst>
           </c:dPt>
@@ -276,7 +276,7 @@
             </c:spPr>
             <c:extLst>
               <c:ext xmlns:c16="http://schemas.microsoft.com/office/drawing/2014/chart" uri="{C3380CC4-5D6E-409C-BE32-E72D297353CC}">
-                <c16:uniqueId val="{00000013-3C60-4441-B0EE-7CAECF3FD172}"/>
+                <c16:uniqueId val="{00000013-0290-4377-9707-2E9A9D4400B0}"/>
               </c:ext>
             </c:extLst>
           </c:dPt>
@@ -292,7 +292,7 @@
             </c:spPr>
             <c:extLst>
               <c:ext xmlns:c16="http://schemas.microsoft.com/office/drawing/2014/chart" uri="{C3380CC4-5D6E-409C-BE32-E72D297353CC}">
-                <c16:uniqueId val="{00000015-3C60-4441-B0EE-7CAECF3FD172}"/>
+                <c16:uniqueId val="{00000015-0290-4377-9707-2E9A9D4400B0}"/>
               </c:ext>
             </c:extLst>
           </c:dPt>
@@ -418,7 +418,7 @@
           </c:val>
           <c:extLst>
             <c:ext xmlns:c16="http://schemas.microsoft.com/office/drawing/2014/chart" uri="{C3380CC4-5D6E-409C-BE32-E72D297353CC}">
-              <c16:uniqueId val="{00000016-3C60-4441-B0EE-7CAECF3FD172}"/>
+              <c16:uniqueId val="{00000016-0290-4377-9707-2E9A9D4400B0}"/>
             </c:ext>
           </c:extLst>
         </c:ser>
@@ -594,7 +594,7 @@
             <c:bubble3D val="0"/>
             <c:extLst>
               <c:ext xmlns:c16="http://schemas.microsoft.com/office/drawing/2014/chart" uri="{C3380CC4-5D6E-409C-BE32-E72D297353CC}">
-                <c16:uniqueId val="{00000001-6593-42C6-81A8-32CC75542433}"/>
+                <c16:uniqueId val="{00000001-EC68-4920-89A4-C2DB676C45D7}"/>
               </c:ext>
             </c:extLst>
           </c:dPt>
@@ -610,7 +610,7 @@
             </c:spPr>
             <c:extLst>
               <c:ext xmlns:c16="http://schemas.microsoft.com/office/drawing/2014/chart" uri="{C3380CC4-5D6E-409C-BE32-E72D297353CC}">
-                <c16:uniqueId val="{00000003-6593-42C6-81A8-32CC75542433}"/>
+                <c16:uniqueId val="{00000003-EC68-4920-89A4-C2DB676C45D7}"/>
               </c:ext>
             </c:extLst>
           </c:dPt>
@@ -682,7 +682,7 @@
           </c:val>
           <c:extLst>
             <c:ext xmlns:c16="http://schemas.microsoft.com/office/drawing/2014/chart" uri="{C3380CC4-5D6E-409C-BE32-E72D297353CC}">
-              <c16:uniqueId val="{00000004-6593-42C6-81A8-32CC75542433}"/>
+              <c16:uniqueId val="{00000004-EC68-4920-89A4-C2DB676C45D7}"/>
             </c:ext>
           </c:extLst>
         </c:ser>
@@ -807,7 +807,7 @@
     </p:spTree>
     <p:extLst>
       <p:ext uri="{BB962C8B-B14F-4D97-AF65-F5344CB8AC3E}">
-        <p14:creationId xmlns:p14="http://schemas.microsoft.com/office/powerpoint/2010/main" val="3023156796"/>
+        <p14:creationId xmlns:p14="http://schemas.microsoft.com/office/powerpoint/2010/main" val="2010689321"/>
       </p:ext>
     </p:extLst>
   </p:cSld>
@@ -953,7 +953,7 @@
           <a:p>
             <a:r>
               <a:rPr lang="en-US" dirty="0"/>
-              <a:t>안녕하세요, CODE 서브웨이 팀입니다. 저희는 상품 뒷면 사진에서 소비기한을 읽는 OCR을 만들었습니다. 오늘 드릴 말씀의 핵심은 제목 그대로입니다. 저희 시스템은 잘 읽는 것만큼, 못 읽었을 때 못 읽었다고 말하는 것을 중요하게 설계했습니다. 왜 그렇게 했는지, 그리고 그 설계가 물류 현장에서 어떤 의미인지 10분 동안 말씀드리겠습니다.</a:t>
+              <a:t>안녕하세요, CODE 서브웨이 팀입니다. 저희는 상품 뒷면 사진에서 소비기한을 읽는 OCR을 만들었습니다. 오늘 드릴 말씀의 핵심은 제목 그대로입니다. 저희 시스템은 잘 읽는 것만큼, 못 읽었을 때 못 읽었다고 말하는 것을 중요하게 설계했습니다. 왜 그렇게 했는지, 그리고 그 설계가 중고거래 서비스에서 어떤 의미인지 10분 동안 말씀드리겠습니다.</a:t>
             </a:r>
           </a:p>
         </p:txBody>
@@ -1388,7 +1388,7 @@
           <a:p>
             <a:r>
               <a:rPr lang="en-US" dirty="0"/>
-              <a:t>실제 실행 화면입니다. 두 번째가 제조일자와 소비기한이 같이 찍힌 경우입니다. 25년 6월 26일과 26년 6월 25일을 둘 다 읽고 늦은 쪽을 골랐습니다. 세 번째는 도트 인쇄인데, 처음엔 못 읽었다가 점을 이어 붙이는 전처리 후에 읽어 낸 경우입니다. 그리고 네 번째를 일부러 넣었습니다. 못 읽은 사진입니다. 저희 시스템은 여기서 날짜를 지어내지 않고 NONE을 냅니다. 이 선택이 다음에 말씀드릴 현장 적용의 핵심입니다.</a:t>
+              <a:t>실제 실행 화면입니다. 두 번째가 제조일자와 소비기한이 같이 찍힌 경우입니다. 25년 6월 26일과 26년 6월 25일을 둘 다 읽고 늦은 쪽을 골랐습니다. 세 번째는 도트 인쇄인데, 처음엔 못 읽었다가 점을 이어 붙이는 전처리 후에 읽어 낸 경우입니다. 그리고 네 번째를 일부러 넣었습니다. 못 읽은 사진입니다. 저희 시스템은 여기서 날짜를 지어내지 않고 NONE을 냅니다. 이 선택이 다음에 말씀드릴 중고거래 적용의 핵심입니다.</a:t>
             </a:r>
           </a:p>
         </p:txBody>
@@ -1475,7 +1475,7 @@
           <a:p>
             <a:r>
               <a:rPr lang="en-US" dirty="0"/>
-              <a:t>마지막으로 현장 적용입니다.</a:t>
+              <a:t>마지막으로 서비스 적용입니다.</a:t>
             </a:r>
           </a:p>
         </p:txBody>
@@ -1562,7 +1562,7 @@
           <a:p>
             <a:r>
               <a:rPr lang="en-US" dirty="0"/>
-              <a:t>적용 대상은 신선식품 물류센터의 입고 검수입니다. 공급사가 신고한 기한과 실제 상품의 기한이 맞는지는 지금 사람이 눈으로 확인합니다. 검수자가 로트별로 대표 상품을 찍으면 OCR이 읽고, 읽은 값을 공급사 신고값과 대조합니다. 일치하면 자동 통과, 어긋나거나 못 읽은 건만 사람에게 갑니다. 여기서 중요한 점은, OCR이 틀리게 읽어도 신고값과 어긋나기 때문에 사람에게 간다는 겁니다. 즉 정확도는 안전성이 아니라 자동화율을 결정합니다. 정말 위험한 건 못 읽는 게 아니라 틀린 값을 자신 있게 내는 것이고, 그래서 저희는 확신이 없으면 NONE을 내도록 설계했습니다.</a:t>
+              <a:t>적용 대상은 중고거래 플랫폼의 식품 게시글입니다. 이번 추석 연휴에 당근에서 선물세트 거래량이 작년보다 50퍼센트 늘었습니다. 소비기한은 판매자가 손으로 적고 아무도 확인하지 않습니다. 판매자가 날짜면을 찍으면 서버가 읽고, 확신할 때만 날짜 칸을 채웁니다. 판매자는 날짜 확대본을 보며 확인하거나 고칩니다. 게시글에는 판매자 사진에서 읽은 날짜와 남은 일수가 붙고, 기한이 임박하면 알림, 지나면 자동으로 숨겨집니다. 핵심은 판매자가 마지막에 확인한다는 점입니다. 모델이 틀려도 한 번 고치면 끝나고, 확신이 없으면 빈칸이니 지금보다 나빠지지 않습니다. 그래서 정확도는 안전성이 아니라 자동 입력 비율을 정합니다. 당근은 이미 인증마크를 OCR로 찾고 있습니다. 저희는 같은 사진에서 소비기한을 찾아 날짜로 확정합니다.</a:t>
             </a:r>
           </a:p>
         </p:txBody>
@@ -1649,7 +1649,7 @@
           <a:p>
             <a:r>
               <a:rPr lang="en-US" dirty="0"/>
-              <a:t>모델 전체가 21메가바이트이고 GPU가 필요 없어서, 검수 단말에 넣으면 통신이 안 되는 냉동 구역에서도 동작하고, 서버 한 대에 두면 시간당 1,200장을 처리합니다. 라이선스 0원, GPU 0대이고, 남는 비용은 사람이 확인하는 인건비입니다. 하루 2,000로트를 건당 20초씩 본다고 가정하면 지금은 하루 11시간입니다. 도입 후에는 예외 400건만 보면 됩니다. 건당 8초는 저희가 오답 446장을 다시 볼 때 잰 실측값이고, 로트 수와 현재 확인 시간은 가정입니다.</a:t>
+              <a:t>1차 대상은 규칙이 가장 명확한 건강기능식품 카테고리입니다. 식약처 자료로 게시글이 월 2만 4천 건입니다. 하루 800장을 장당 3초로 읽으면 CPU 40분이라 비용은 사실상 0입니다. 아래 표가 중요합니다. 직접 찍은 폰 사진 389장으로 쟀을 때, 무조건 채우면 21퍼센트의 판매자가 틀린 값을 받습니다. 확신도 0.7 이상일 때만 채우면 절반 가까이 자동으로 채워지고 틀린 값은 10퍼센트로 줄어듭니다. 가치를 인력 절감으로 부풀리지는 않았습니다. 소비기한 위반은 전체 위반의 5퍼센트뿐이기 때문입니다. 대신 판매자가 고친 값이 공짜 라벨이 되어, 쓸수록 자동 입력 비율이 올라갑니다.</a:t>
             </a:r>
           </a:p>
         </p:txBody>
@@ -1736,7 +1736,7 @@
           <a:p>
             <a:r>
               <a:rPr lang="en-US" dirty="0"/>
-              <a:t>한계를 말씀드리겠습니다. 저희는 86퍼센트라는 숫자를 그대로 믿지 않았습니다. 오답이 몰린 도트 인쇄, 각인, 두 날짜 병기 위주로 팀원 네 명이 편의점에서 389장을 직접 찍었고, 모델이 한 번도 본 적 없는 그 사진에 돌렸더니 52퍼센트, 미인식이 22퍼센트였습니다. 찍은 사람에 따라 44에서 70퍼센트까지 갈렸습니다. 약점의 실제 크기는 이만큼입니다. 남은 오답은 규칙이 아니라 인식 품질의 문제라서, 촬영 단계에서 날짜를 가까이 찍게 안내하고, 못 읽은 날짜 줄을 사람이 골라 재학습하는 방향으로 보완합니다.</a:t>
+              <a:t>한계입니다. 판매자가 폰으로 찍는 사진이 저희 약점입니다. 팀원 네 명이 편의점에서 389장을 직접 찍어 돌렸더니 52퍼센트였고, 찍은 사람에 따라 44에서 70퍼센트까지 갈렸습니다. 가장 위험한 건 남은 날을 많게 읽는 경우로 4.9퍼센트입니다. 그래서 읽은 날짜가 제품 유형별 최대 기한을 넘으면 판독 불가로 처리하고, 자동 차단 대신 재확인 요청으로 설계했습니다. 선물세트처럼 여러 상품이 든 경우는 상품별로 찍게 합니다.</a:t>
             </a:r>
           </a:p>
         </p:txBody>
@@ -1823,7 +1823,7 @@
           <a:p>
             <a:r>
               <a:rPr lang="en-US" dirty="0"/>
-              <a:t>이 구조는 식품에만 쓰이지 않습니다. 의약품이나 화학 제품의 출하 표시물에서 제조번호와 사용기한을 검증하는 일도 같은 구조입니다. 모델은 글자를 읽는 일만 하고 도메인 지식은 규칙 문서에 있기 때문에, 형식 규칙만 바꾸면 됩니다.</a:t>
+              <a:t>확장입니다. 건강기능식품에서 시작해 가공식품과 명절 선물세트로 넓히고, 지금은 잡음으로 지우는 품목보고번호를 읽으면 제품 조회와 회수 대상 확인까지 할 수 있습니다. 같은 파이프라인은 공장의 출하 전 날짜 인쇄 확인이나 의약품 표시물 검증에도 형식 규칙만 바꿔 쓸 수 있습니다.</a:t>
             </a:r>
           </a:p>
         </p:txBody>
@@ -1997,7 +1997,7 @@
           <a:p>
             <a:r>
               <a:rPr lang="en-US" dirty="0"/>
-              <a:t>정리하겠습니다. 첫째, 제약에서 출발해 봉인 500장 86.2퍼센트를 한도의 60퍼센트 시간에 냈습니다. 둘째, 검증을 먼저 세웠습니다. 점수가 올라도 잘 맞히던 걸 망가뜨리면 버렸습니다. 셋째, 틀리는 방식을 설계했습니다. 확신이 없으면 못 읽었다고 말하는 시스템이기 때문에, 현장에서 사람과 함께 일할 수 있습니다. 감사합니다.</a:t>
+              <a:t>정리하겠습니다. 첫째, 제약에서 출발해 봉인 500장 86.2퍼센트를 한도의 60퍼센트 시간에 냈습니다. 둘째, 검증을 먼저 세웠습니다. 점수가 올라도 잘 맞히던 걸 망가뜨리면 버렸습니다. 셋째, 틀리는 방식을 설계했습니다. 확신이 없으면 못 읽었다고 말하기 때문에, 판매자가 믿고 쓸 수 있습니다. 감사합니다.</a:t>
             </a:r>
           </a:p>
         </p:txBody>
@@ -3255,7 +3255,7 @@
                 <a:ea typeface="Pretendard SemiBold" pitchFamily="34" charset="-122"/>
                 <a:cs typeface="Pretendard SemiBold" pitchFamily="34" charset="-120"/>
               </a:rPr>
-              <a:t>소비기한 추출 파이프라인과 물류 입고 검수 적용</a:t>
+              <a:t>소비기한 추출 파이프라인과 중고거래 잔여기한 안내</a:t>
             </a:r>
             <a:endParaRPr lang="en-US" sz="2000" dirty="0"/>
           </a:p>
@@ -10044,7 +10044,7 @@
                 <a:ea typeface="Pretendard SemiBold" pitchFamily="34" charset="-122"/>
                 <a:cs typeface="Pretendard SemiBold" pitchFamily="34" charset="-120"/>
               </a:rPr>
-              <a:t>미인식 → 사람 확인</a:t>
+              <a:t>미인식 → 판매자 입력</a:t>
             </a:r>
             <a:endParaRPr lang="en-US" sz="1150" dirty="0"/>
           </a:p>
@@ -10156,7 +10156,7 @@
                 <a:ea typeface="Pretendard SemiBold" pitchFamily="34" charset="-122"/>
                 <a:cs typeface="Pretendard SemiBold" pitchFamily="34" charset="-120"/>
               </a:rPr>
-              <a:t>네 번째 : 후보가 없으면 날짜를 지어내지 않고 NONE. 현장에서는 이 건만 사람에게 간다</a:t>
+              <a:t>네 번째 : 후보가 없으면 날짜를 지어내지 않고 NONE. 게시 화면에서는 빈칸으로 두고 판매자가 입력한다</a:t>
             </a:r>
             <a:endParaRPr lang="en-US" sz="1050" dirty="0"/>
           </a:p>
@@ -10419,7 +10419,7 @@
                 <a:ea typeface="Pretendard SemiBold" pitchFamily="34" charset="-122"/>
                 <a:cs typeface="Pretendard SemiBold" pitchFamily="34" charset="-120"/>
               </a:rPr>
-              <a:t>물류센터 입고 검수</a:t>
+              <a:t>중고거래 식품 게시글의 잔여기한</a:t>
             </a:r>
             <a:endParaRPr lang="en-US" sz="1200" dirty="0"/>
           </a:p>
@@ -10566,7 +10566,7 @@
                 <a:ea typeface="Pretendard SemiBold" pitchFamily="34" charset="-122"/>
                 <a:cs typeface="Pretendard SemiBold" pitchFamily="34" charset="-120"/>
               </a:rPr>
-              <a:t>신선식품 물류센터 입고 검수</a:t>
+              <a:t>중고거래 식품, 잔여기한을 거래 정보로</a:t>
             </a:r>
             <a:endParaRPr lang="en-US" sz="1900" dirty="0"/>
           </a:p>
@@ -10659,7 +10659,7 @@
               <a:buNone/>
             </a:pPr>
             <a:r>
-              <a:rPr lang="en-US" sz="1200" dirty="0">
+              <a:rPr lang="en-US" sz="1150" dirty="0">
                 <a:solidFill>
                   <a:srgbClr val="1A1A1A"/>
                 </a:solidFill>
@@ -10667,10 +10667,10 @@
                 <a:ea typeface="Pretendard SemiBold" pitchFamily="34" charset="-122"/>
                 <a:cs typeface="Pretendard SemiBold" pitchFamily="34" charset="-120"/>
               </a:rPr>
-              <a:t>센터는 기한이 빠른 상품부터 출고한다. 그런데 </a:t>
-            </a:r>
-            <a:r>
-              <a:rPr lang="en-US" sz="1200" dirty="0">
+              <a:t>명절 선물세트가 중고거래로 : 당근 추석 연휴 선물세트 거래량 </a:t>
+            </a:r>
+            <a:r>
+              <a:rPr lang="en-US" sz="1150" dirty="0">
                 <a:solidFill>
                   <a:srgbClr val="8B0000"/>
                 </a:solidFill>
@@ -10678,10 +10678,10 @@
                 <a:ea typeface="Pretendard SemiBold" pitchFamily="34" charset="-122"/>
                 <a:cs typeface="Pretendard SemiBold" pitchFamily="34" charset="-120"/>
               </a:rPr>
-              <a:t>공급사가 신고한 기한과 실물이 맞는지</a:t>
-            </a:r>
-            <a:r>
-              <a:rPr lang="en-US" sz="1200" dirty="0">
+              <a:t>+50%</a:t>
+            </a:r>
+            <a:r>
+              <a:rPr lang="en-US" sz="1150" dirty="0">
                 <a:solidFill>
                   <a:srgbClr val="1A1A1A"/>
                 </a:solidFill>
@@ -10689,9 +10689,9 @@
                 <a:ea typeface="Pretendard SemiBold" pitchFamily="34" charset="-122"/>
                 <a:cs typeface="Pretendard SemiBold" pitchFamily="34" charset="-120"/>
               </a:rPr>
-              <a:t> 는 지금 사람이 눈으로 확인한다</a:t>
-            </a:r>
-            <a:endParaRPr lang="en-US" sz="1200" dirty="0"/>
+              <a:t> (전년 대비). 그런데 소비기한은 판매자가 손으로 적는다</a:t>
+            </a:r>
+            <a:endParaRPr lang="en-US" sz="1150" dirty="0"/>
           </a:p>
         </p:txBody>
       </p:sp>
@@ -10794,7 +10794,7 @@
                 <a:ea typeface="Pretendard SemiBold" pitchFamily="34" charset="-122"/>
                 <a:cs typeface="Pretendard SemiBold" pitchFamily="34" charset="-120"/>
               </a:rPr>
-              <a:t>검수자가 로트별</a:t>
+              <a:t>판매자가 앱 카메라로</a:t>
             </a:r>
             <a:endParaRPr lang="en-US" sz="980" dirty="0"/>
           </a:p>
@@ -10811,7 +10811,7 @@
                 <a:ea typeface="Pretendard SemiBold" pitchFamily="34" charset="-122"/>
                 <a:cs typeface="Pretendard SemiBold" pitchFamily="34" charset="-120"/>
               </a:rPr>
-              <a:t>대표 상품 표시면 촬영</a:t>
+              <a:t>날짜면 촬영</a:t>
             </a:r>
             <a:endParaRPr lang="en-US" sz="980" dirty="0"/>
           </a:p>
@@ -10955,7 +10955,7 @@
                 <a:ea typeface="Pretendard SemiBold" pitchFamily="34" charset="-122"/>
                 <a:cs typeface="Pretendard SemiBold" pitchFamily="34" charset="-120"/>
               </a:rPr>
-              <a:t>온디바이스 또는</a:t>
+              <a:t>서버 CPU, 장당 약 3초</a:t>
             </a:r>
             <a:endParaRPr lang="en-US" sz="980" dirty="0"/>
           </a:p>
@@ -10972,7 +10972,7 @@
                 <a:ea typeface="Pretendard SemiBold" pitchFamily="34" charset="-122"/>
                 <a:cs typeface="Pretendard SemiBold" pitchFamily="34" charset="-120"/>
               </a:rPr>
-              <a:t>센터 내 CPU 서버</a:t>
+              <a:t>확신할 때만 날짜 채움</a:t>
             </a:r>
             <a:endParaRPr lang="en-US" sz="980" dirty="0"/>
           </a:p>
@@ -11077,7 +11077,7 @@
                 <a:ea typeface="Pretendard SemiBold" pitchFamily="34" charset="-122"/>
                 <a:cs typeface="Pretendard SemiBold" pitchFamily="34" charset="-120"/>
               </a:rPr>
-              <a:t>대조</a:t>
+              <a:t>확인</a:t>
             </a:r>
             <a:endParaRPr lang="en-US" sz="1300" dirty="0"/>
           </a:p>
@@ -11116,7 +11116,7 @@
                 <a:ea typeface="Pretendard SemiBold" pitchFamily="34" charset="-122"/>
                 <a:cs typeface="Pretendard SemiBold" pitchFamily="34" charset="-120"/>
               </a:rPr>
-              <a:t>읽은 값 vs 공급사 신고값</a:t>
+              <a:t>날짜 확대본을 보며</a:t>
             </a:r>
             <a:endParaRPr lang="en-US" sz="980" dirty="0"/>
           </a:p>
@@ -11133,7 +11133,7 @@
                 <a:ea typeface="Pretendard SemiBold" pitchFamily="34" charset="-122"/>
                 <a:cs typeface="Pretendard SemiBold" pitchFamily="34" charset="-120"/>
               </a:rPr>
-              <a:t>잔여기한 기준 계산</a:t>
+              <a:t>판매자가 확인·수정</a:t>
             </a:r>
             <a:endParaRPr lang="en-US" sz="980" dirty="0"/>
           </a:p>
@@ -11230,7 +11230,7 @@
               <a:buNone/>
             </a:pPr>
             <a:r>
-              <a:rPr lang="en-US" sz="1150" dirty="0">
+              <a:rPr lang="en-US" sz="1030" dirty="0">
                 <a:solidFill>
                   <a:srgbClr val="8B0000"/>
                 </a:solidFill>
@@ -11238,10 +11238,10 @@
                 <a:ea typeface="Pretendard SemiBold" pitchFamily="34" charset="-122"/>
                 <a:cs typeface="Pretendard SemiBold" pitchFamily="34" charset="-120"/>
               </a:rPr>
-              <a:t>일치</a:t>
-            </a:r>
-            <a:r>
-              <a:rPr lang="en-US" sz="1150" dirty="0">
+              <a:t>게시글</a:t>
+            </a:r>
+            <a:r>
+              <a:rPr lang="en-US" sz="1030" dirty="0">
                 <a:solidFill>
                   <a:srgbClr val="1A1A1A"/>
                 </a:solidFill>
@@ -11249,9 +11249,26 @@
                 <a:ea typeface="Pretendard SemiBold" pitchFamily="34" charset="-122"/>
                 <a:cs typeface="Pretendard SemiBold" pitchFamily="34" charset="-120"/>
               </a:rPr>
-              <a:t>  →  자동 통과 (약 80%)</a:t>
-            </a:r>
-            <a:endParaRPr lang="en-US" sz="1150" dirty="0"/>
+              <a:t>  소비기한 2027-03-14 · 167일 남음</a:t>
+            </a:r>
+            <a:endParaRPr lang="en-US" sz="1030" dirty="0"/>
+          </a:p>
+          <a:p>
+            <a:pPr marL="0" indent="0">
+              <a:buNone/>
+            </a:pPr>
+            <a:r>
+              <a:rPr lang="en-US" sz="1030" dirty="0">
+                <a:solidFill>
+                  <a:srgbClr val="1A1A1A"/>
+                </a:solidFill>
+                <a:latin typeface="Pretendard SemiBold" pitchFamily="34" charset="0"/>
+                <a:ea typeface="Pretendard SemiBold" pitchFamily="34" charset="-122"/>
+                <a:cs typeface="Pretendard SemiBold" pitchFamily="34" charset="-120"/>
+              </a:rPr>
+              <a:t>(판매자 사진 판독값 + 날짜 원본)</a:t>
+            </a:r>
+            <a:endParaRPr lang="en-US" sz="1030" dirty="0"/>
           </a:p>
         </p:txBody>
       </p:sp>
@@ -11307,7 +11324,7 @@
               <a:buNone/>
             </a:pPr>
             <a:r>
-              <a:rPr lang="en-US" sz="1100" dirty="0">
+              <a:rPr lang="en-US" sz="1030" dirty="0">
                 <a:solidFill>
                   <a:srgbClr val="8B0000"/>
                 </a:solidFill>
@@ -11315,16 +11332,10 @@
                 <a:ea typeface="Pretendard SemiBold" pitchFamily="34" charset="-122"/>
                 <a:cs typeface="Pretendard SemiBold" pitchFamily="34" charset="-120"/>
               </a:rPr>
-              <a:t>불일치 · 미인식 · 기준 미달</a:t>
-            </a:r>
-            <a:endParaRPr lang="en-US" sz="1100" dirty="0"/>
-          </a:p>
-          <a:p>
-            <a:pPr marL="0" indent="0">
-              <a:buNone/>
-            </a:pPr>
-            <a:r>
-              <a:rPr lang="en-US" sz="1100" dirty="0">
+              <a:t>기한 임박</a:t>
+            </a:r>
+            <a:r>
+              <a:rPr lang="en-US" sz="1030" dirty="0">
                 <a:solidFill>
                   <a:srgbClr val="1A1A1A"/>
                 </a:solidFill>
@@ -11332,9 +11343,32 @@
                 <a:ea typeface="Pretendard SemiBold" pitchFamily="34" charset="-122"/>
                 <a:cs typeface="Pretendard SemiBold" pitchFamily="34" charset="-120"/>
               </a:rPr>
-              <a:t>→  사람 확인 대기열</a:t>
-            </a:r>
-            <a:endParaRPr lang="en-US" sz="1100" dirty="0"/>
+              <a:t>  →  가격 인하·나눔 제안
+</a:t>
+            </a:r>
+            <a:r>
+              <a:rPr lang="en-US" sz="1030" dirty="0">
+                <a:solidFill>
+                  <a:srgbClr val="8B0000"/>
+                </a:solidFill>
+                <a:latin typeface="Pretendard SemiBold" pitchFamily="34" charset="0"/>
+                <a:ea typeface="Pretendard SemiBold" pitchFamily="34" charset="-122"/>
+                <a:cs typeface="Pretendard SemiBold" pitchFamily="34" charset="-120"/>
+              </a:rPr>
+              <a:t>기한 경과</a:t>
+            </a:r>
+            <a:r>
+              <a:rPr lang="en-US" sz="1030" dirty="0">
+                <a:solidFill>
+                  <a:srgbClr val="1A1A1A"/>
+                </a:solidFill>
+                <a:latin typeface="Pretendard SemiBold" pitchFamily="34" charset="0"/>
+                <a:ea typeface="Pretendard SemiBold" pitchFamily="34" charset="-122"/>
+                <a:cs typeface="Pretendard SemiBold" pitchFamily="34" charset="-120"/>
+              </a:rPr>
+              <a:t>  →  게시글 자동 숨김</a:t>
+            </a:r>
+            <a:endParaRPr lang="en-US" sz="1030" dirty="0"/>
           </a:p>
         </p:txBody>
       </p:sp>
@@ -11437,7 +11471,7 @@
                 <a:ea typeface="Pretendard SemiBold" pitchFamily="34" charset="-122"/>
                 <a:cs typeface="Pretendard SemiBold" pitchFamily="34" charset="-120"/>
               </a:rPr>
-              <a:t>OCR이 잘못 읽어도 신고값과 어긋나 사람에게 간다. 그래서 정확도는 </a:t>
+              <a:t>판매자가 마지막에 확인하므로, 모델이 틀려도 한 번 고치면 끝난다. 그래서 정확도는 </a:t>
             </a:r>
             <a:r>
               <a:rPr lang="en-US" sz="1080" dirty="0">
@@ -11448,7 +11482,7 @@
                 <a:ea typeface="Pretendard SemiBold" pitchFamily="34" charset="-122"/>
                 <a:cs typeface="Pretendard SemiBold" pitchFamily="34" charset="-120"/>
               </a:rPr>
-              <a:t>안전성이 아니라 자동화율</a:t>
+              <a:t>안전성이 아니라 자동 입력 비율</a:t>
             </a:r>
             <a:r>
               <a:rPr lang="en-US" sz="1080" dirty="0">
@@ -11459,7 +11493,7 @@
                 <a:ea typeface="Pretendard SemiBold" pitchFamily="34" charset="-122"/>
                 <a:cs typeface="Pretendard SemiBold" pitchFamily="34" charset="-120"/>
               </a:rPr>
-              <a:t> 을 결정한다. 위험한 것은 "못 읽음" 이 아니라 "틀린 값을 자신 있게 냄" 이고, 우리는 그래서 NONE 을 설계했다</a:t>
+              <a:t> 을 결정한다. 확신이 없으면 빈칸(NONE) 으로 두니 지금보다 나빠지지 않는다</a:t>
             </a:r>
             <a:endParaRPr lang="en-US" sz="1080" dirty="0"/>
           </a:p>
@@ -11525,7 +11559,7 @@
                 <a:ea typeface="Pretendard SemiBold" pitchFamily="34" charset="-122"/>
                 <a:cs typeface="Pretendard SemiBold" pitchFamily="34" charset="-120"/>
               </a:rPr>
-              <a:t>운영에서 더 세지는 신호</a:t>
+              <a:t>속이는 판매자는?</a:t>
             </a:r>
             <a:endParaRPr lang="en-US" sz="1200" dirty="0"/>
           </a:p>
@@ -11568,7 +11602,7 @@
                 <a:ea typeface="Pretendard SemiBold" pitchFamily="34" charset="-122"/>
                 <a:cs typeface="Pretendard SemiBold" pitchFamily="34" charset="-120"/>
               </a:rPr>
-              <a:t>읽은 날짜가 오늘보다 이르면 경고 (대회 데이터에서 이 신호의 오답률 72%)</a:t>
+              <a:t>사기 방지 장치가 아니다. 스티커 위조·다른 상품 촬영은 기존 사후 모니터링 몫</a:t>
             </a:r>
             <a:endParaRPr lang="en-US" sz="1050" dirty="0"/>
           </a:p>
@@ -11589,7 +11623,7 @@
                 <a:ea typeface="Pretendard SemiBold" pitchFamily="34" charset="-122"/>
                 <a:cs typeface="Pretendard SemiBold" pitchFamily="34" charset="-120"/>
               </a:rPr>
-              <a:t>제조·포장 키워드만 읽히면 경고 (오답률 57%)</a:t>
+              <a:t>"확인됨" 대신 판독값과 날짜 원본을 보여 줘, 위조에 신뢰를 빌려주지 않는다</a:t>
             </a:r>
             <a:endParaRPr lang="en-US" sz="1050" dirty="0"/>
           </a:p>
@@ -11610,7 +11644,7 @@
                 <a:ea typeface="Pretendard SemiBold" pitchFamily="34" charset="-122"/>
                 <a:cs typeface="Pretendard SemiBold" pitchFamily="34" charset="-120"/>
               </a:rPr>
-              <a:t>사람이 고친 값은 이력과 함께 재학습 데이터로</a:t>
+              <a:t>원본·촬영 시각·수정 이력은 신고 시 증거로 보존</a:t>
             </a:r>
             <a:endParaRPr lang="en-US" sz="1050" dirty="0"/>
           </a:p>
@@ -11676,7 +11710,7 @@
                 <a:ea typeface="Pretendard SemiBold" pitchFamily="34" charset="-122"/>
                 <a:cs typeface="Pretendard SemiBold" pitchFamily="34" charset="-120"/>
               </a:rPr>
-              <a:t>기한 정보가 담긴 QR 이 없는 상품을 맡는 </a:t>
+              <a:t>당근은 이미 사진에서 인증마크를 OCR 로 찾는다. 우리는 같은 사진에서 </a:t>
             </a:r>
             <a:r>
               <a:rPr lang="en-US" sz="1250" dirty="0">
@@ -11687,7 +11721,7 @@
                 <a:ea typeface="Pretendard SemiBold" pitchFamily="34" charset="-122"/>
                 <a:cs typeface="Pretendard SemiBold" pitchFamily="34" charset="-120"/>
               </a:rPr>
-              <a:t>보완 수단</a:t>
+              <a:t>소비기한을 찾아 날짜로 확정</a:t>
             </a:r>
             <a:r>
               <a:rPr lang="en-US" sz="1250" dirty="0">
@@ -11698,7 +11732,7 @@
                 <a:ea typeface="Pretendard SemiBold" pitchFamily="34" charset="-122"/>
                 <a:cs typeface="Pretendard SemiBold" pitchFamily="34" charset="-120"/>
               </a:rPr>
-              <a:t> : 제조사 수천 곳이 아니라 읽는 쪽 한 곳만 바뀌면 된다</a:t>
+              <a:t> 한다</a:t>
             </a:r>
             <a:endParaRPr lang="en-US" sz="1250" dirty="0"/>
           </a:p>
@@ -11806,7 +11840,7 @@
                 <a:ea typeface="Pretendard SemiBold" pitchFamily="34" charset="-122"/>
                 <a:cs typeface="Pretendard SemiBold" pitchFamily="34" charset="-120"/>
               </a:rPr>
-              <a:t>CPU 한 대로 시작한다</a:t>
+              <a:t>이미 도는 OCR 옆에 CPU 한 대</a:t>
             </a:r>
             <a:endParaRPr lang="en-US" sz="1900" dirty="0"/>
           </a:p>
@@ -11897,24 +11931,17 @@
             <a:tbl>
               <a:tblPr/>
               <a:tblGrid>
-                <a:gridCol w="1097280">
+                <a:gridCol w="914400">
                   <a:extLst>
                     <a:ext uri="{9D8B030D-6E8A-4147-A177-3AD203B41FA5}">
                       <a16:colId xmlns:a16="http://schemas.microsoft.com/office/drawing/2014/main" val="20000"/>
                     </a:ext>
                   </a:extLst>
                 </a:gridCol>
-                <a:gridCol w="2011680">
+                <a:gridCol w="4206240">
                   <a:extLst>
                     <a:ext uri="{9D8B030D-6E8A-4147-A177-3AD203B41FA5}">
                       <a16:colId xmlns:a16="http://schemas.microsoft.com/office/drawing/2014/main" val="20001"/>
-                    </a:ext>
-                  </a:extLst>
-                </a:gridCol>
-                <a:gridCol w="2011680">
-                  <a:extLst>
-                    <a:ext uri="{9D8B030D-6E8A-4147-A177-3AD203B41FA5}">
-                      <a16:colId xmlns:a16="http://schemas.microsoft.com/office/drawing/2014/main" val="20002"/>
                     </a:ext>
                   </a:extLst>
                 </a:gridCol>
@@ -11929,7 +11956,7 @@
                         <a:buNone/>
                       </a:pPr>
                       <a:r>
-                        <a:rPr lang="en-US" sz="1000" dirty="0">
+                        <a:rPr lang="en-US" sz="980" dirty="0">
                           <a:solidFill>
                             <a:srgbClr val="FFFFFF"/>
                           </a:solidFill>
@@ -11937,9 +11964,9 @@
                           <a:ea typeface="Pretendard SemiBold" pitchFamily="34" charset="-122"/>
                           <a:cs typeface="Pretendard SemiBold" pitchFamily="34" charset="-120"/>
                         </a:rPr>
-                        <a:t>구성</a:t>
+                        <a:t>항목</a:t>
                       </a:r>
-                      <a:endParaRPr lang="en-US" sz="1000" dirty="0">
+                      <a:endParaRPr lang="en-US" sz="980" dirty="0">
                         <a:latin typeface="Pretendard SemiBold" charset="0"/>
                         <a:ea typeface="Pretendard SemiBold" charset="0"/>
                         <a:cs typeface="Pretendard SemiBold" charset="0"/>
@@ -11997,7 +12024,7 @@
                         <a:buNone/>
                       </a:pPr>
                       <a:r>
-                        <a:rPr lang="en-US" sz="1000" dirty="0">
+                        <a:rPr lang="en-US" sz="980" dirty="0">
                           <a:solidFill>
                             <a:srgbClr val="FFFFFF"/>
                           </a:solidFill>
@@ -12005,77 +12032,9 @@
                           <a:ea typeface="Pretendard SemiBold" pitchFamily="34" charset="-122"/>
                           <a:cs typeface="Pretendard SemiBold" pitchFamily="34" charset="-120"/>
                         </a:rPr>
-                        <a:t>온디바이스 (검수 단말)</a:t>
+                        <a:t>내용</a:t>
                       </a:r>
-                      <a:endParaRPr lang="en-US" sz="1000" dirty="0">
-                        <a:latin typeface="Pretendard SemiBold" charset="0"/>
-                        <a:ea typeface="Pretendard SemiBold" charset="0"/>
-                        <a:cs typeface="Pretendard SemiBold" charset="0"/>
-                      </a:endParaRPr>
-                    </a:p>
-                  </a:txBody>
-                  <a:tcPr marL="76200" marR="76200" marT="38100" marB="38100" anchor="ctr">
-                    <a:lnL w="6350" cap="flat" cmpd="sng" algn="ctr">
-                      <a:solidFill>
-                        <a:srgbClr val="9A9A9A"/>
-                      </a:solidFill>
-                      <a:prstDash val="solid"/>
-                      <a:round/>
-                      <a:headEnd type="none" w="med" len="med"/>
-                      <a:tailEnd type="none" w="med" len="med"/>
-                    </a:lnL>
-                    <a:lnR w="6350" cap="flat" cmpd="sng" algn="ctr">
-                      <a:solidFill>
-                        <a:srgbClr val="9A9A9A"/>
-                      </a:solidFill>
-                      <a:prstDash val="solid"/>
-                      <a:round/>
-                      <a:headEnd type="none" w="med" len="med"/>
-                      <a:tailEnd type="none" w="med" len="med"/>
-                    </a:lnR>
-                    <a:lnT w="6350" cap="flat" cmpd="sng" algn="ctr">
-                      <a:solidFill>
-                        <a:srgbClr val="9A9A9A"/>
-                      </a:solidFill>
-                      <a:prstDash val="solid"/>
-                      <a:round/>
-                      <a:headEnd type="none" w="med" len="med"/>
-                      <a:tailEnd type="none" w="med" len="med"/>
-                    </a:lnT>
-                    <a:lnB w="6350" cap="flat" cmpd="sng" algn="ctr">
-                      <a:solidFill>
-                        <a:srgbClr val="9A9A9A"/>
-                      </a:solidFill>
-                      <a:prstDash val="solid"/>
-                      <a:round/>
-                      <a:headEnd type="none" w="med" len="med"/>
-                      <a:tailEnd type="none" w="med" len="med"/>
-                    </a:lnB>
-                    <a:solidFill>
-                      <a:srgbClr val="3A3A3A"/>
-                    </a:solidFill>
-                  </a:tcPr>
-                </a:tc>
-                <a:tc>
-                  <a:txBody>
-                    <a:bodyPr/>
-                    <a:lstStyle/>
-                    <a:p>
-                      <a:pPr marL="0" indent="0" algn="l">
-                        <a:buNone/>
-                      </a:pPr>
-                      <a:r>
-                        <a:rPr lang="en-US" sz="1000" dirty="0">
-                          <a:solidFill>
-                            <a:srgbClr val="FFFFFF"/>
-                          </a:solidFill>
-                          <a:latin typeface="Pretendard SemiBold" pitchFamily="34" charset="0"/>
-                          <a:ea typeface="Pretendard SemiBold" pitchFamily="34" charset="-122"/>
-                          <a:cs typeface="Pretendard SemiBold" pitchFamily="34" charset="-120"/>
-                        </a:rPr>
-                        <a:t>센터 내 서버</a:t>
-                      </a:r>
-                      <a:endParaRPr lang="en-US" sz="1000" dirty="0">
+                      <a:endParaRPr lang="en-US" sz="980" dirty="0">
                         <a:latin typeface="Pretendard SemiBold" charset="0"/>
                         <a:ea typeface="Pretendard SemiBold" charset="0"/>
                         <a:cs typeface="Pretendard SemiBold" charset="0"/>
@@ -12140,7 +12099,7 @@
                         <a:buNone/>
                       </a:pPr>
                       <a:r>
-                        <a:rPr lang="en-US" sz="1000" dirty="0">
+                        <a:rPr lang="en-US" sz="980" dirty="0">
                           <a:solidFill>
                             <a:srgbClr val="1A1A1A"/>
                           </a:solidFill>
@@ -12148,9 +12107,9 @@
                           <a:ea typeface="Pretendard SemiBold" pitchFamily="34" charset="-122"/>
                           <a:cs typeface="Pretendard SemiBold" pitchFamily="34" charset="-120"/>
                         </a:rPr>
-                        <a:t>환경</a:t>
+                        <a:t>1차 대상</a:t>
                       </a:r>
-                      <a:endParaRPr lang="en-US" sz="1000" dirty="0">
+                      <a:endParaRPr lang="en-US" sz="980" dirty="0">
                         <a:latin typeface="Pretendard SemiBold" charset="0"/>
                         <a:ea typeface="Pretendard SemiBold" charset="0"/>
                         <a:cs typeface="Pretendard SemiBold" charset="0"/>
@@ -12208,7 +12167,7 @@
                         <a:buNone/>
                       </a:pPr>
                       <a:r>
-                        <a:rPr lang="en-US" sz="1000" dirty="0">
+                        <a:rPr lang="en-US" sz="980" dirty="0">
                           <a:solidFill>
                             <a:srgbClr val="1A1A1A"/>
                           </a:solidFill>
@@ -12216,77 +12175,9 @@
                           <a:ea typeface="Pretendard SemiBold" pitchFamily="34" charset="-122"/>
                           <a:cs typeface="Pretendard SemiBold" pitchFamily="34" charset="-120"/>
                         </a:rPr>
-                        <a:t>핸디 단말·태블릿 CPU</a:t>
+                        <a:t>건강기능식품 카테고리 (소비기한 6개월 이상, 필수 기재)</a:t>
                       </a:r>
-                      <a:endParaRPr lang="en-US" sz="1000" dirty="0">
-                        <a:latin typeface="Pretendard SemiBold" charset="0"/>
-                        <a:ea typeface="Pretendard SemiBold" charset="0"/>
-                        <a:cs typeface="Pretendard SemiBold" charset="0"/>
-                      </a:endParaRPr>
-                    </a:p>
-                  </a:txBody>
-                  <a:tcPr marL="76200" marR="76200" marT="38100" marB="38100" anchor="ctr">
-                    <a:lnL w="6350" cap="flat" cmpd="sng" algn="ctr">
-                      <a:solidFill>
-                        <a:srgbClr val="9A9A9A"/>
-                      </a:solidFill>
-                      <a:prstDash val="solid"/>
-                      <a:round/>
-                      <a:headEnd type="none" w="med" len="med"/>
-                      <a:tailEnd type="none" w="med" len="med"/>
-                    </a:lnL>
-                    <a:lnR w="6350" cap="flat" cmpd="sng" algn="ctr">
-                      <a:solidFill>
-                        <a:srgbClr val="9A9A9A"/>
-                      </a:solidFill>
-                      <a:prstDash val="solid"/>
-                      <a:round/>
-                      <a:headEnd type="none" w="med" len="med"/>
-                      <a:tailEnd type="none" w="med" len="med"/>
-                    </a:lnR>
-                    <a:lnT w="6350" cap="flat" cmpd="sng" algn="ctr">
-                      <a:solidFill>
-                        <a:srgbClr val="9A9A9A"/>
-                      </a:solidFill>
-                      <a:prstDash val="solid"/>
-                      <a:round/>
-                      <a:headEnd type="none" w="med" len="med"/>
-                      <a:tailEnd type="none" w="med" len="med"/>
-                    </a:lnT>
-                    <a:lnB w="6350" cap="flat" cmpd="sng" algn="ctr">
-                      <a:solidFill>
-                        <a:srgbClr val="9A9A9A"/>
-                      </a:solidFill>
-                      <a:prstDash val="solid"/>
-                      <a:round/>
-                      <a:headEnd type="none" w="med" len="med"/>
-                      <a:tailEnd type="none" w="med" len="med"/>
-                    </a:lnB>
-                    <a:solidFill>
-                      <a:srgbClr val="FFFFFF"/>
-                    </a:solidFill>
-                  </a:tcPr>
-                </a:tc>
-                <a:tc>
-                  <a:txBody>
-                    <a:bodyPr/>
-                    <a:lstStyle/>
-                    <a:p>
-                      <a:pPr marL="0" indent="0" algn="l">
-                        <a:buNone/>
-                      </a:pPr>
-                      <a:r>
-                        <a:rPr lang="en-US" sz="1000" dirty="0">
-                          <a:solidFill>
-                            <a:srgbClr val="1A1A1A"/>
-                          </a:solidFill>
-                          <a:latin typeface="Pretendard SemiBold" pitchFamily="34" charset="0"/>
-                          <a:ea typeface="Pretendard SemiBold" pitchFamily="34" charset="-122"/>
-                          <a:cs typeface="Pretendard SemiBold" pitchFamily="34" charset="-120"/>
-                        </a:rPr>
-                        <a:t>4코어 CPU 서버 1대, GPU 없음</a:t>
-                      </a:r>
-                      <a:endParaRPr lang="en-US" sz="1000" dirty="0">
+                      <a:endParaRPr lang="en-US" sz="980" dirty="0">
                         <a:latin typeface="Pretendard SemiBold" charset="0"/>
                         <a:ea typeface="Pretendard SemiBold" charset="0"/>
                         <a:cs typeface="Pretendard SemiBold" charset="0"/>
@@ -12351,7 +12242,7 @@
                         <a:buNone/>
                       </a:pPr>
                       <a:r>
-                        <a:rPr lang="en-US" sz="1000" dirty="0">
+                        <a:rPr lang="en-US" sz="980" dirty="0">
                           <a:solidFill>
                             <a:srgbClr val="1A1A1A"/>
                           </a:solidFill>
@@ -12359,9 +12250,9 @@
                           <a:ea typeface="Pretendard SemiBold" pitchFamily="34" charset="-122"/>
                           <a:cs typeface="Pretendard SemiBold" pitchFamily="34" charset="-120"/>
                         </a:rPr>
-                        <a:t>모델</a:t>
+                        <a:t>규모</a:t>
                       </a:r>
-                      <a:endParaRPr lang="en-US" sz="1000" dirty="0">
+                      <a:endParaRPr lang="en-US" sz="980" dirty="0">
                         <a:latin typeface="Pretendard SemiBold" charset="0"/>
                         <a:ea typeface="Pretendard SemiBold" charset="0"/>
                         <a:cs typeface="Pretendard SemiBold" charset="0"/>
@@ -12419,7 +12310,7 @@
                         <a:buNone/>
                       </a:pPr>
                       <a:r>
-                        <a:rPr lang="en-US" sz="1000" dirty="0">
+                        <a:rPr lang="en-US" sz="980" dirty="0">
                           <a:solidFill>
                             <a:srgbClr val="1A1A1A"/>
                           </a:solidFill>
@@ -12427,77 +12318,9 @@
                           <a:ea typeface="Pretendard SemiBold" pitchFamily="34" charset="-122"/>
                           <a:cs typeface="Pretendard SemiBold" pitchFamily="34" charset="-120"/>
                         </a:rPr>
-                        <a:t>탐지 5MB + 인식 8MB × 2</a:t>
+                        <a:t>월 약 2.4만 건 (20개월 게시글 48만 건, 식약처 자료)</a:t>
                       </a:r>
-                      <a:endParaRPr lang="en-US" sz="1000" dirty="0">
-                        <a:latin typeface="Pretendard SemiBold" charset="0"/>
-                        <a:ea typeface="Pretendard SemiBold" charset="0"/>
-                        <a:cs typeface="Pretendard SemiBold" charset="0"/>
-                      </a:endParaRPr>
-                    </a:p>
-                  </a:txBody>
-                  <a:tcPr marL="76200" marR="76200" marT="38100" marB="38100" anchor="ctr">
-                    <a:lnL w="6350" cap="flat" cmpd="sng" algn="ctr">
-                      <a:solidFill>
-                        <a:srgbClr val="9A9A9A"/>
-                      </a:solidFill>
-                      <a:prstDash val="solid"/>
-                      <a:round/>
-                      <a:headEnd type="none" w="med" len="med"/>
-                      <a:tailEnd type="none" w="med" len="med"/>
-                    </a:lnL>
-                    <a:lnR w="6350" cap="flat" cmpd="sng" algn="ctr">
-                      <a:solidFill>
-                        <a:srgbClr val="9A9A9A"/>
-                      </a:solidFill>
-                      <a:prstDash val="solid"/>
-                      <a:round/>
-                      <a:headEnd type="none" w="med" len="med"/>
-                      <a:tailEnd type="none" w="med" len="med"/>
-                    </a:lnR>
-                    <a:lnT w="6350" cap="flat" cmpd="sng" algn="ctr">
-                      <a:solidFill>
-                        <a:srgbClr val="9A9A9A"/>
-                      </a:solidFill>
-                      <a:prstDash val="solid"/>
-                      <a:round/>
-                      <a:headEnd type="none" w="med" len="med"/>
-                      <a:tailEnd type="none" w="med" len="med"/>
-                    </a:lnT>
-                    <a:lnB w="6350" cap="flat" cmpd="sng" algn="ctr">
-                      <a:solidFill>
-                        <a:srgbClr val="9A9A9A"/>
-                      </a:solidFill>
-                      <a:prstDash val="solid"/>
-                      <a:round/>
-                      <a:headEnd type="none" w="med" len="med"/>
-                      <a:tailEnd type="none" w="med" len="med"/>
-                    </a:lnB>
-                    <a:solidFill>
-                      <a:srgbClr val="FFFFFF"/>
-                    </a:solidFill>
-                  </a:tcPr>
-                </a:tc>
-                <a:tc>
-                  <a:txBody>
-                    <a:bodyPr/>
-                    <a:lstStyle/>
-                    <a:p>
-                      <a:pPr marL="0" indent="0" algn="l">
-                        <a:buNone/>
-                      </a:pPr>
-                      <a:r>
-                        <a:rPr lang="en-US" sz="1000" dirty="0">
-                          <a:solidFill>
-                            <a:srgbClr val="1A1A1A"/>
-                          </a:solidFill>
-                          <a:latin typeface="Pretendard SemiBold" pitchFamily="34" charset="0"/>
-                          <a:ea typeface="Pretendard SemiBold" pitchFamily="34" charset="-122"/>
-                          <a:cs typeface="Pretendard SemiBold" pitchFamily="34" charset="-120"/>
-                        </a:rPr>
-                        <a:t>동일 (총 21MB)</a:t>
-                      </a:r>
-                      <a:endParaRPr lang="en-US" sz="1000" dirty="0">
+                      <a:endParaRPr lang="en-US" sz="980" dirty="0">
                         <a:latin typeface="Pretendard SemiBold" charset="0"/>
                         <a:ea typeface="Pretendard SemiBold" charset="0"/>
                         <a:cs typeface="Pretendard SemiBold" charset="0"/>
@@ -12562,7 +12385,7 @@
                         <a:buNone/>
                       </a:pPr>
                       <a:r>
-                        <a:rPr lang="en-US" sz="1000" dirty="0">
+                        <a:rPr lang="en-US" sz="980" dirty="0">
                           <a:solidFill>
                             <a:srgbClr val="1A1A1A"/>
                           </a:solidFill>
@@ -12570,9 +12393,9 @@
                           <a:ea typeface="Pretendard SemiBold" pitchFamily="34" charset="-122"/>
                           <a:cs typeface="Pretendard SemiBold" pitchFamily="34" charset="-120"/>
                         </a:rPr>
-                        <a:t>네트워크</a:t>
+                        <a:t>처리</a:t>
                       </a:r>
-                      <a:endParaRPr lang="en-US" sz="1000" dirty="0">
+                      <a:endParaRPr lang="en-US" sz="980" dirty="0">
                         <a:latin typeface="Pretendard SemiBold" charset="0"/>
                         <a:ea typeface="Pretendard SemiBold" charset="0"/>
                         <a:cs typeface="Pretendard SemiBold" charset="0"/>
@@ -12630,7 +12453,7 @@
                         <a:buNone/>
                       </a:pPr>
                       <a:r>
-                        <a:rPr lang="en-US" sz="1000" dirty="0">
+                        <a:rPr lang="en-US" sz="980" dirty="0">
                           <a:solidFill>
                             <a:srgbClr val="1A1A1A"/>
                           </a:solidFill>
@@ -12638,77 +12461,9 @@
                           <a:ea typeface="Pretendard SemiBold" pitchFamily="34" charset="-122"/>
                           <a:cs typeface="Pretendard SemiBold" pitchFamily="34" charset="-120"/>
                         </a:rPr>
-                        <a:t>불필요 (오프라인 동작 검증)</a:t>
+                        <a:t>게시할 때 1장, 장당 약 3초 → 하루 800장 ≈ CPU 40분</a:t>
                       </a:r>
-                      <a:endParaRPr lang="en-US" sz="1000" dirty="0">
-                        <a:latin typeface="Pretendard SemiBold" charset="0"/>
-                        <a:ea typeface="Pretendard SemiBold" charset="0"/>
-                        <a:cs typeface="Pretendard SemiBold" charset="0"/>
-                      </a:endParaRPr>
-                    </a:p>
-                  </a:txBody>
-                  <a:tcPr marL="76200" marR="76200" marT="38100" marB="38100" anchor="ctr">
-                    <a:lnL w="6350" cap="flat" cmpd="sng" algn="ctr">
-                      <a:solidFill>
-                        <a:srgbClr val="9A9A9A"/>
-                      </a:solidFill>
-                      <a:prstDash val="solid"/>
-                      <a:round/>
-                      <a:headEnd type="none" w="med" len="med"/>
-                      <a:tailEnd type="none" w="med" len="med"/>
-                    </a:lnL>
-                    <a:lnR w="6350" cap="flat" cmpd="sng" algn="ctr">
-                      <a:solidFill>
-                        <a:srgbClr val="9A9A9A"/>
-                      </a:solidFill>
-                      <a:prstDash val="solid"/>
-                      <a:round/>
-                      <a:headEnd type="none" w="med" len="med"/>
-                      <a:tailEnd type="none" w="med" len="med"/>
-                    </a:lnR>
-                    <a:lnT w="6350" cap="flat" cmpd="sng" algn="ctr">
-                      <a:solidFill>
-                        <a:srgbClr val="9A9A9A"/>
-                      </a:solidFill>
-                      <a:prstDash val="solid"/>
-                      <a:round/>
-                      <a:headEnd type="none" w="med" len="med"/>
-                      <a:tailEnd type="none" w="med" len="med"/>
-                    </a:lnT>
-                    <a:lnB w="6350" cap="flat" cmpd="sng" algn="ctr">
-                      <a:solidFill>
-                        <a:srgbClr val="9A9A9A"/>
-                      </a:solidFill>
-                      <a:prstDash val="solid"/>
-                      <a:round/>
-                      <a:headEnd type="none" w="med" len="med"/>
-                      <a:tailEnd type="none" w="med" len="med"/>
-                    </a:lnB>
-                    <a:solidFill>
-                      <a:srgbClr val="FFFFFF"/>
-                    </a:solidFill>
-                  </a:tcPr>
-                </a:tc>
-                <a:tc>
-                  <a:txBody>
-                    <a:bodyPr/>
-                    <a:lstStyle/>
-                    <a:p>
-                      <a:pPr marL="0" indent="0" algn="l">
-                        <a:buNone/>
-                      </a:pPr>
-                      <a:r>
-                        <a:rPr lang="en-US" sz="1000" dirty="0">
-                          <a:solidFill>
-                            <a:srgbClr val="1A1A1A"/>
-                          </a:solidFill>
-                          <a:latin typeface="Pretendard SemiBold" pitchFamily="34" charset="0"/>
-                          <a:ea typeface="Pretendard SemiBold" pitchFamily="34" charset="-122"/>
-                          <a:cs typeface="Pretendard SemiBold" pitchFamily="34" charset="-120"/>
-                        </a:rPr>
-                        <a:t>센터 내부망</a:t>
-                      </a:r>
-                      <a:endParaRPr lang="en-US" sz="1000" dirty="0">
+                      <a:endParaRPr lang="en-US" sz="980" dirty="0">
                         <a:latin typeface="Pretendard SemiBold" charset="0"/>
                         <a:ea typeface="Pretendard SemiBold" charset="0"/>
                         <a:cs typeface="Pretendard SemiBold" charset="0"/>
@@ -12773,7 +12528,7 @@
                         <a:buNone/>
                       </a:pPr>
                       <a:r>
-                        <a:rPr lang="en-US" sz="1000" dirty="0">
+                        <a:rPr lang="en-US" sz="980" dirty="0">
                           <a:solidFill>
                             <a:srgbClr val="1A1A1A"/>
                           </a:solidFill>
@@ -12781,9 +12536,9 @@
                           <a:ea typeface="Pretendard SemiBold" pitchFamily="34" charset="-122"/>
                           <a:cs typeface="Pretendard SemiBold" pitchFamily="34" charset="-120"/>
                         </a:rPr>
-                        <a:t>처리량</a:t>
+                        <a:t>모델</a:t>
                       </a:r>
-                      <a:endParaRPr lang="en-US" sz="1000" dirty="0">
+                      <a:endParaRPr lang="en-US" sz="980" dirty="0">
                         <a:latin typeface="Pretendard SemiBold" charset="0"/>
                         <a:ea typeface="Pretendard SemiBold" charset="0"/>
                         <a:cs typeface="Pretendard SemiBold" charset="0"/>
@@ -12841,7 +12596,7 @@
                         <a:buNone/>
                       </a:pPr>
                       <a:r>
-                        <a:rPr lang="en-US" sz="1000" dirty="0">
+                        <a:rPr lang="en-US" sz="980" dirty="0">
                           <a:solidFill>
                             <a:srgbClr val="1A1A1A"/>
                           </a:solidFill>
@@ -12849,77 +12604,9 @@
                           <a:ea typeface="Pretendard SemiBold" pitchFamily="34" charset="-122"/>
                           <a:cs typeface="Pretendard SemiBold" pitchFamily="34" charset="-120"/>
                         </a:rPr>
-                        <a:t>장당 약 3초</a:t>
+                        <a:t>21MB, GPU 없음 · 서버 또는 폰 온디바이스</a:t>
                       </a:r>
-                      <a:endParaRPr lang="en-US" sz="1000" dirty="0">
-                        <a:latin typeface="Pretendard SemiBold" charset="0"/>
-                        <a:ea typeface="Pretendard SemiBold" charset="0"/>
-                        <a:cs typeface="Pretendard SemiBold" charset="0"/>
-                      </a:endParaRPr>
-                    </a:p>
-                  </a:txBody>
-                  <a:tcPr marL="76200" marR="76200" marT="38100" marB="38100" anchor="ctr">
-                    <a:lnL w="6350" cap="flat" cmpd="sng" algn="ctr">
-                      <a:solidFill>
-                        <a:srgbClr val="9A9A9A"/>
-                      </a:solidFill>
-                      <a:prstDash val="solid"/>
-                      <a:round/>
-                      <a:headEnd type="none" w="med" len="med"/>
-                      <a:tailEnd type="none" w="med" len="med"/>
-                    </a:lnL>
-                    <a:lnR w="6350" cap="flat" cmpd="sng" algn="ctr">
-                      <a:solidFill>
-                        <a:srgbClr val="9A9A9A"/>
-                      </a:solidFill>
-                      <a:prstDash val="solid"/>
-                      <a:round/>
-                      <a:headEnd type="none" w="med" len="med"/>
-                      <a:tailEnd type="none" w="med" len="med"/>
-                    </a:lnR>
-                    <a:lnT w="6350" cap="flat" cmpd="sng" algn="ctr">
-                      <a:solidFill>
-                        <a:srgbClr val="9A9A9A"/>
-                      </a:solidFill>
-                      <a:prstDash val="solid"/>
-                      <a:round/>
-                      <a:headEnd type="none" w="med" len="med"/>
-                      <a:tailEnd type="none" w="med" len="med"/>
-                    </a:lnT>
-                    <a:lnB w="6350" cap="flat" cmpd="sng" algn="ctr">
-                      <a:solidFill>
-                        <a:srgbClr val="9A9A9A"/>
-                      </a:solidFill>
-                      <a:prstDash val="solid"/>
-                      <a:round/>
-                      <a:headEnd type="none" w="med" len="med"/>
-                      <a:tailEnd type="none" w="med" len="med"/>
-                    </a:lnB>
-                    <a:solidFill>
-                      <a:srgbClr val="FFFFFF"/>
-                    </a:solidFill>
-                  </a:tcPr>
-                </a:tc>
-                <a:tc>
-                  <a:txBody>
-                    <a:bodyPr/>
-                    <a:lstStyle/>
-                    <a:p>
-                      <a:pPr marL="0" indent="0" algn="l">
-                        <a:buNone/>
-                      </a:pPr>
-                      <a:r>
-                        <a:rPr lang="en-US" sz="1000" dirty="0">
-                          <a:solidFill>
-                            <a:srgbClr val="1A1A1A"/>
-                          </a:solidFill>
-                          <a:latin typeface="Pretendard SemiBold" pitchFamily="34" charset="0"/>
-                          <a:ea typeface="Pretendard SemiBold" pitchFamily="34" charset="-122"/>
-                          <a:cs typeface="Pretendard SemiBold" pitchFamily="34" charset="-120"/>
-                        </a:rPr>
-                        <a:t>시간당 약 1,200장</a:t>
-                      </a:r>
-                      <a:endParaRPr lang="en-US" sz="1000" dirty="0">
+                      <a:endParaRPr lang="en-US" sz="980" dirty="0">
                         <a:latin typeface="Pretendard SemiBold" charset="0"/>
                         <a:ea typeface="Pretendard SemiBold" charset="0"/>
                         <a:cs typeface="Pretendard SemiBold" charset="0"/>
@@ -12984,7 +12671,7 @@
                         <a:buNone/>
                       </a:pPr>
                       <a:r>
-                        <a:rPr lang="en-US" sz="1000" dirty="0">
+                        <a:rPr lang="en-US" sz="980" dirty="0">
                           <a:solidFill>
                             <a:srgbClr val="1A1A1A"/>
                           </a:solidFill>
@@ -12992,9 +12679,9 @@
                           <a:ea typeface="Pretendard SemiBold" pitchFamily="34" charset="-122"/>
                           <a:cs typeface="Pretendard SemiBold" pitchFamily="34" charset="-120"/>
                         </a:rPr>
-                        <a:t>적합한 곳</a:t>
+                        <a:t>판정</a:t>
                       </a:r>
-                      <a:endParaRPr lang="en-US" sz="1000" dirty="0">
+                      <a:endParaRPr lang="en-US" sz="980" dirty="0">
                         <a:latin typeface="Pretendard SemiBold" charset="0"/>
                         <a:ea typeface="Pretendard SemiBold" charset="0"/>
                         <a:cs typeface="Pretendard SemiBold" charset="0"/>
@@ -13052,7 +12739,7 @@
                         <a:buNone/>
                       </a:pPr>
                       <a:r>
-                        <a:rPr lang="en-US" sz="1000" dirty="0">
+                        <a:rPr lang="en-US" sz="980" dirty="0">
                           <a:solidFill>
                             <a:srgbClr val="1A1A1A"/>
                           </a:solidFill>
@@ -13060,77 +12747,9 @@
                           <a:ea typeface="Pretendard SemiBold" pitchFamily="34" charset="-122"/>
                           <a:cs typeface="Pretendard SemiBold" pitchFamily="34" charset="-120"/>
                         </a:rPr>
-                        <a:t>냉장·냉동 구역, 통신 음영</a:t>
+                        <a:t>6개월 미만·기한 경과로 읽히면 재확인 요청 (자동 차단 안 함)</a:t>
                       </a:r>
-                      <a:endParaRPr lang="en-US" sz="1000" dirty="0">
-                        <a:latin typeface="Pretendard SemiBold" charset="0"/>
-                        <a:ea typeface="Pretendard SemiBold" charset="0"/>
-                        <a:cs typeface="Pretendard SemiBold" charset="0"/>
-                      </a:endParaRPr>
-                    </a:p>
-                  </a:txBody>
-                  <a:tcPr marL="76200" marR="76200" marT="38100" marB="38100" anchor="ctr">
-                    <a:lnL w="6350" cap="flat" cmpd="sng" algn="ctr">
-                      <a:solidFill>
-                        <a:srgbClr val="9A9A9A"/>
-                      </a:solidFill>
-                      <a:prstDash val="solid"/>
-                      <a:round/>
-                      <a:headEnd type="none" w="med" len="med"/>
-                      <a:tailEnd type="none" w="med" len="med"/>
-                    </a:lnL>
-                    <a:lnR w="6350" cap="flat" cmpd="sng" algn="ctr">
-                      <a:solidFill>
-                        <a:srgbClr val="9A9A9A"/>
-                      </a:solidFill>
-                      <a:prstDash val="solid"/>
-                      <a:round/>
-                      <a:headEnd type="none" w="med" len="med"/>
-                      <a:tailEnd type="none" w="med" len="med"/>
-                    </a:lnR>
-                    <a:lnT w="6350" cap="flat" cmpd="sng" algn="ctr">
-                      <a:solidFill>
-                        <a:srgbClr val="9A9A9A"/>
-                      </a:solidFill>
-                      <a:prstDash val="solid"/>
-                      <a:round/>
-                      <a:headEnd type="none" w="med" len="med"/>
-                      <a:tailEnd type="none" w="med" len="med"/>
-                    </a:lnT>
-                    <a:lnB w="6350" cap="flat" cmpd="sng" algn="ctr">
-                      <a:solidFill>
-                        <a:srgbClr val="9A9A9A"/>
-                      </a:solidFill>
-                      <a:prstDash val="solid"/>
-                      <a:round/>
-                      <a:headEnd type="none" w="med" len="med"/>
-                      <a:tailEnd type="none" w="med" len="med"/>
-                    </a:lnB>
-                    <a:solidFill>
-                      <a:srgbClr val="FFFFFF"/>
-                    </a:solidFill>
-                  </a:tcPr>
-                </a:tc>
-                <a:tc>
-                  <a:txBody>
-                    <a:bodyPr/>
-                    <a:lstStyle/>
-                    <a:p>
-                      <a:pPr marL="0" indent="0" algn="l">
-                        <a:buNone/>
-                      </a:pPr>
-                      <a:r>
-                        <a:rPr lang="en-US" sz="1000" dirty="0">
-                          <a:solidFill>
-                            <a:srgbClr val="1A1A1A"/>
-                          </a:solidFill>
-                          <a:latin typeface="Pretendard SemiBold" pitchFamily="34" charset="0"/>
-                          <a:ea typeface="Pretendard SemiBold" pitchFamily="34" charset="-122"/>
-                          <a:cs typeface="Pretendard SemiBold" pitchFamily="34" charset="-120"/>
-                        </a:rPr>
-                        <a:t>검수대 고정 촬영, 이력 집계</a:t>
-                      </a:r>
-                      <a:endParaRPr lang="en-US" sz="1000" dirty="0">
+                      <a:endParaRPr lang="en-US" sz="980" dirty="0">
                         <a:latin typeface="Pretendard SemiBold" charset="0"/>
                         <a:ea typeface="Pretendard SemiBold" charset="0"/>
                         <a:cs typeface="Pretendard SemiBold" charset="0"/>
@@ -13249,7 +12868,7 @@
                 <a:ea typeface="Pretendard SemiBold" pitchFamily="34" charset="-122"/>
                 <a:cs typeface="Pretendard SemiBold" pitchFamily="34" charset="-120"/>
               </a:rPr>
-              <a:t>비용 구조</a:t>
+              <a:t>비용과 가치</a:t>
             </a:r>
             <a:endParaRPr lang="en-US" sz="1200" dirty="0"/>
           </a:p>
@@ -13264,7 +12883,7 @@
         <p:spPr>
           <a:xfrm>
             <a:off x="5715000" y="1252728"/>
-            <a:ext cx="3017520" cy="1463040"/>
+            <a:ext cx="3017520" cy="1481328"/>
           </a:xfrm>
           <a:prstGeom prst="rect">
             <a:avLst/>
@@ -13284,7 +12903,7 @@
               <a:buChar char="•"/>
             </a:pPr>
             <a:r>
-              <a:rPr lang="en-US" sz="1050" dirty="0">
+              <a:rPr lang="en-US" sz="1020" dirty="0">
                 <a:solidFill>
                   <a:srgbClr val="1A1A1A"/>
                 </a:solidFill>
@@ -13292,9 +12911,9 @@
                 <a:ea typeface="Pretendard SemiBold" pitchFamily="34" charset="-122"/>
                 <a:cs typeface="Pretendard SemiBold" pitchFamily="34" charset="-120"/>
               </a:rPr>
-              <a:t>라이선스 0원 (오픈소스 모델, 외부 API 없음)</a:t>
-            </a:r>
-            <a:endParaRPr lang="en-US" sz="1050" dirty="0"/>
+              <a:t>비용 ≈ 0 : 라이선스 0원, GPU 0대, 서버 CPU 일부</a:t>
+            </a:r>
+            <a:endParaRPr lang="en-US" sz="1020" dirty="0"/>
           </a:p>
           <a:p>
             <a:pPr marL="342900" indent="-342900">
@@ -13305,7 +12924,7 @@
               <a:buChar char="•"/>
             </a:pPr>
             <a:r>
-              <a:rPr lang="en-US" sz="1050" dirty="0">
+              <a:rPr lang="en-US" sz="1020" dirty="0">
                 <a:solidFill>
                   <a:srgbClr val="1A1A1A"/>
                 </a:solidFill>
@@ -13313,9 +12932,9 @@
                 <a:ea typeface="Pretendard SemiBold" pitchFamily="34" charset="-122"/>
                 <a:cs typeface="Pretendard SemiBold" pitchFamily="34" charset="-120"/>
               </a:rPr>
-              <a:t>GPU 0대, 학습 비용 0원</a:t>
-            </a:r>
-            <a:endParaRPr lang="en-US" sz="1050" dirty="0"/>
+              <a:t>가치 : 잔여기한 안내·검색, 입력 편의, 기한 경과 글 자동 숨김</a:t>
+            </a:r>
+            <a:endParaRPr lang="en-US" sz="1020" dirty="0"/>
           </a:p>
           <a:p>
             <a:pPr marL="342900" indent="-342900">
@@ -13326,7 +12945,7 @@
               <a:buChar char="•"/>
             </a:pPr>
             <a:r>
-              <a:rPr lang="en-US" sz="1050" dirty="0">
+              <a:rPr lang="en-US" sz="1020" dirty="0">
                 <a:solidFill>
                   <a:srgbClr val="1A1A1A"/>
                 </a:solidFill>
@@ -13334,30 +12953,9 @@
                 <a:ea typeface="Pretendard SemiBold" pitchFamily="34" charset="-122"/>
                 <a:cs typeface="Pretendard SemiBold" pitchFamily="34" charset="-120"/>
               </a:rPr>
-              <a:t>서버 1대 또는 기존 단말 활용</a:t>
-            </a:r>
-            <a:endParaRPr lang="en-US" sz="1050" dirty="0"/>
-          </a:p>
-          <a:p>
-            <a:pPr marL="342900" indent="-342900">
-              <a:spcAft>
-                <a:spcPts val="300"/>
-              </a:spcAft>
-              <a:buSzPct val="100000"/>
-              <a:buChar char="•"/>
-            </a:pPr>
-            <a:r>
-              <a:rPr lang="en-US" sz="1050" dirty="0">
-                <a:solidFill>
-                  <a:srgbClr val="1A1A1A"/>
-                </a:solidFill>
-                <a:latin typeface="Pretendard SemiBold" pitchFamily="34" charset="0"/>
-                <a:ea typeface="Pretendard SemiBold" pitchFamily="34" charset="-122"/>
-                <a:cs typeface="Pretendard SemiBold" pitchFamily="34" charset="-120"/>
-              </a:rPr>
-              <a:t>남는 비용은 사람 확인 인건비</a:t>
-            </a:r>
-            <a:endParaRPr lang="en-US" sz="1050" dirty="0"/>
+              <a:t>인력 절감으로 부풀리지 않는다 : 소비기한 위반은 전체 위반의 5% (725 / 14,729건)</a:t>
+            </a:r>
+            <a:endParaRPr lang="en-US" sz="1020" dirty="0"/>
           </a:p>
         </p:txBody>
       </p:sp>
@@ -13394,7 +12992,7 @@
                 <a:ea typeface="Pretendard SemiBold" pitchFamily="34" charset="-122"/>
                 <a:cs typeface="Pretendard SemiBold" pitchFamily="34" charset="-120"/>
               </a:rPr>
-              <a:t>절감 효과 계산 (가정을 명시한 추정)</a:t>
+              <a:t>자동 입력 기준 (판매자 폰 사진을 흉내 낸 직접 촬영 389장 실측)</a:t>
             </a:r>
             <a:endParaRPr lang="en-US" sz="1250" dirty="0"/>
           </a:p>
@@ -13423,28 +13021,28 @@
             <a:tbl>
               <a:tblPr/>
               <a:tblGrid>
-                <a:gridCol w="2011680">
+                <a:gridCol w="2560320">
                   <a:extLst>
                     <a:ext uri="{9D8B030D-6E8A-4147-A177-3AD203B41FA5}">
                       <a16:colId xmlns:a16="http://schemas.microsoft.com/office/drawing/2014/main" val="20000"/>
                     </a:ext>
                   </a:extLst>
                 </a:gridCol>
-                <a:gridCol w="2926080">
+                <a:gridCol w="2011680">
                   <a:extLst>
                     <a:ext uri="{9D8B030D-6E8A-4147-A177-3AD203B41FA5}">
                       <a16:colId xmlns:a16="http://schemas.microsoft.com/office/drawing/2014/main" val="20001"/>
                     </a:ext>
                   </a:extLst>
                 </a:gridCol>
-                <a:gridCol w="1737360">
+                <a:gridCol w="2011680">
                   <a:extLst>
                     <a:ext uri="{9D8B030D-6E8A-4147-A177-3AD203B41FA5}">
                       <a16:colId xmlns:a16="http://schemas.microsoft.com/office/drawing/2014/main" val="20002"/>
                     </a:ext>
                   </a:extLst>
                 </a:gridCol>
-                <a:gridCol w="1920240">
+                <a:gridCol w="2011680">
                   <a:extLst>
                     <a:ext uri="{9D8B030D-6E8A-4147-A177-3AD203B41FA5}">
                       <a16:colId xmlns:a16="http://schemas.microsoft.com/office/drawing/2014/main" val="20003"/>
@@ -13470,7 +13068,7 @@
                           <a:ea typeface="Pretendard SemiBold" pitchFamily="34" charset="-122"/>
                           <a:cs typeface="Pretendard SemiBold" pitchFamily="34" charset="-120"/>
                         </a:rPr>
-                        <a:t>항목</a:t>
+                        <a:t>자동 입력 기준</a:t>
                       </a:r>
                       <a:endParaRPr lang="en-US" sz="1000" dirty="0">
                         <a:latin typeface="Pretendard SemiBold" charset="0"/>
@@ -13538,7 +13136,7 @@
                           <a:ea typeface="Pretendard SemiBold" pitchFamily="34" charset="-122"/>
                           <a:cs typeface="Pretendard SemiBold" pitchFamily="34" charset="-120"/>
                         </a:rPr>
-                        <a:t>가정</a:t>
+                        <a:t>채워지는 비율</a:t>
                       </a:r>
                       <a:endParaRPr lang="en-US" sz="1000" dirty="0">
                         <a:latin typeface="Pretendard SemiBold" charset="0"/>
@@ -13606,7 +13204,7 @@
                           <a:ea typeface="Pretendard SemiBold" pitchFamily="34" charset="-122"/>
                           <a:cs typeface="Pretendard SemiBold" pitchFamily="34" charset="-120"/>
                         </a:rPr>
-                        <a:t>계산</a:t>
+                        <a:t>채운 값의 정확도</a:t>
                       </a:r>
                       <a:endParaRPr lang="en-US" sz="1000" dirty="0">
                         <a:latin typeface="Pretendard SemiBold" charset="0"/>
@@ -13674,7 +13272,7 @@
                           <a:ea typeface="Pretendard SemiBold" pitchFamily="34" charset="-122"/>
                           <a:cs typeface="Pretendard SemiBold" pitchFamily="34" charset="-120"/>
                         </a:rPr>
-                        <a:t>결과</a:t>
+                        <a:t>틀린 값을 받는 판매자</a:t>
                       </a:r>
                       <a:endParaRPr lang="en-US" sz="1000" dirty="0">
                         <a:latin typeface="Pretendard SemiBold" charset="0"/>
@@ -13749,7 +13347,7 @@
                           <a:ea typeface="Pretendard SemiBold" pitchFamily="34" charset="-122"/>
                           <a:cs typeface="Pretendard SemiBold" pitchFamily="34" charset="-120"/>
                         </a:rPr>
-                        <a:t>현재 : 전수 육안 확인</a:t>
+                        <a:t>읽히면 무조건 채움</a:t>
                       </a:r>
                       <a:endParaRPr lang="en-US" sz="1000" dirty="0">
                         <a:latin typeface="Pretendard SemiBold" charset="0"/>
@@ -13817,7 +13415,7 @@
                           <a:ea typeface="Pretendard SemiBold" pitchFamily="34" charset="-122"/>
                           <a:cs typeface="Pretendard SemiBold" pitchFamily="34" charset="-120"/>
                         </a:rPr>
-                        <a:t>하루 2,000 로트, 건당 20초</a:t>
+                        <a:t>70%</a:t>
                       </a:r>
                       <a:endParaRPr lang="en-US" sz="1000" dirty="0">
                         <a:latin typeface="Pretendard SemiBold" charset="0"/>
@@ -13885,7 +13483,7 @@
                           <a:ea typeface="Pretendard SemiBold" pitchFamily="34" charset="-122"/>
                           <a:cs typeface="Pretendard SemiBold" pitchFamily="34" charset="-120"/>
                         </a:rPr>
-                        <a:t>2,000 × 20초</a:t>
+                        <a:t>70%</a:t>
                       </a:r>
                       <a:endParaRPr lang="en-US" sz="1000" dirty="0">
                         <a:latin typeface="Pretendard SemiBold" charset="0"/>
@@ -13953,7 +13551,7 @@
                           <a:ea typeface="Pretendard SemiBold" pitchFamily="34" charset="-122"/>
                           <a:cs typeface="Pretendard SemiBold" pitchFamily="34" charset="-120"/>
                         </a:rPr>
-                        <a:t>하루 11.1시간</a:t>
+                        <a:t>21%</a:t>
                       </a:r>
                       <a:endParaRPr lang="en-US" sz="1000" dirty="0">
                         <a:latin typeface="Pretendard SemiBold" charset="0"/>
@@ -14028,7 +13626,7 @@
                           <a:ea typeface="Pretendard SemiBold" pitchFamily="34" charset="-122"/>
                           <a:cs typeface="Pretendard SemiBold" pitchFamily="34" charset="-120"/>
                         </a:rPr>
-                        <a:t>도입 후 : 예외만 확인</a:t>
+                        <a:t>확신도 0.7 이상만</a:t>
                       </a:r>
                       <a:endParaRPr lang="en-US" sz="1000" dirty="0">
                         <a:latin typeface="Pretendard SemiBold" charset="0"/>
@@ -14075,7 +13673,7 @@
                       <a:tailEnd type="none" w="med" len="med"/>
                     </a:lnB>
                     <a:solidFill>
-                      <a:srgbClr val="FFFFFF"/>
+                      <a:srgbClr val="F6E3E3"/>
                     </a:solidFill>
                   </a:tcPr>
                 </a:tc>
@@ -14096,7 +13694,7 @@
                           <a:ea typeface="Pretendard SemiBold" pitchFamily="34" charset="-122"/>
                           <a:cs typeface="Pretendard SemiBold" pitchFamily="34" charset="-120"/>
                         </a:rPr>
-                        <a:t>자동 통과 80%, 확인 건당 8초 (실측)</a:t>
+                        <a:t>45%</a:t>
                       </a:r>
                       <a:endParaRPr lang="en-US" sz="1000" dirty="0">
                         <a:latin typeface="Pretendard SemiBold" charset="0"/>
@@ -14143,7 +13741,7 @@
                       <a:tailEnd type="none" w="med" len="med"/>
                     </a:lnB>
                     <a:solidFill>
-                      <a:srgbClr val="FFFFFF"/>
+                      <a:srgbClr val="F6E3E3"/>
                     </a:solidFill>
                   </a:tcPr>
                 </a:tc>
@@ -14164,7 +13762,7 @@
                           <a:ea typeface="Pretendard SemiBold" pitchFamily="34" charset="-122"/>
                           <a:cs typeface="Pretendard SemiBold" pitchFamily="34" charset="-120"/>
                         </a:rPr>
-                        <a:t>400 × 8초 + 촬영</a:t>
+                        <a:t>77%</a:t>
                       </a:r>
                       <a:endParaRPr lang="en-US" sz="1000" dirty="0">
                         <a:latin typeface="Pretendard SemiBold" charset="0"/>
@@ -14211,7 +13809,7 @@
                       <a:tailEnd type="none" w="med" len="med"/>
                     </a:lnB>
                     <a:solidFill>
-                      <a:srgbClr val="FFFFFF"/>
+                      <a:srgbClr val="F6E3E3"/>
                     </a:solidFill>
                   </a:tcPr>
                 </a:tc>
@@ -14232,7 +13830,7 @@
                           <a:ea typeface="Pretendard SemiBold" pitchFamily="34" charset="-122"/>
                           <a:cs typeface="Pretendard SemiBold" pitchFamily="34" charset="-120"/>
                         </a:rPr>
-                        <a:t>하루 0.9시간 + 촬영</a:t>
+                        <a:t>10%</a:t>
                       </a:r>
                       <a:endParaRPr lang="en-US" sz="1000" dirty="0">
                         <a:latin typeface="Pretendard SemiBold" charset="0"/>
@@ -14279,7 +13877,7 @@
                       <a:tailEnd type="none" w="med" len="med"/>
                     </a:lnB>
                     <a:solidFill>
-                      <a:srgbClr val="FFFFFF"/>
+                      <a:srgbClr val="F6E3E3"/>
                     </a:solidFill>
                   </a:tcPr>
                 </a:tc>
@@ -14307,7 +13905,7 @@
                           <a:ea typeface="Pretendard SemiBold" pitchFamily="34" charset="-122"/>
                           <a:cs typeface="Pretendard SemiBold" pitchFamily="34" charset="-120"/>
                         </a:rPr>
-                        <a:t>실측 근거</a:t>
+                        <a:t>확신도 0.9 이상만</a:t>
                       </a:r>
                       <a:endParaRPr lang="en-US" sz="1000" dirty="0">
                         <a:latin typeface="Pretendard SemiBold" charset="0"/>
@@ -14375,7 +13973,7 @@
                           <a:ea typeface="Pretendard SemiBold" pitchFamily="34" charset="-122"/>
                           <a:cs typeface="Pretendard SemiBold" pitchFamily="34" charset="-120"/>
                         </a:rPr>
-                        <a:t>오답 446장 점검에 61분</a:t>
+                        <a:t>17%</a:t>
                       </a:r>
                       <a:endParaRPr lang="en-US" sz="1000" dirty="0">
                         <a:latin typeface="Pretendard SemiBold" charset="0"/>
@@ -14443,7 +14041,7 @@
                           <a:ea typeface="Pretendard SemiBold" pitchFamily="34" charset="-122"/>
                           <a:cs typeface="Pretendard SemiBold" pitchFamily="34" charset="-120"/>
                         </a:rPr>
-                        <a:t>장당 평균 8초</a:t>
+                        <a:t>88%</a:t>
                       </a:r>
                       <a:endParaRPr lang="en-US" sz="1000" dirty="0">
                         <a:latin typeface="Pretendard SemiBold" charset="0"/>
@@ -14511,7 +14109,7 @@
                           <a:ea typeface="Pretendard SemiBold" pitchFamily="34" charset="-122"/>
                           <a:cs typeface="Pretendard SemiBold" pitchFamily="34" charset="-120"/>
                         </a:rPr>
-                        <a:t>불일치율 15.6%</a:t>
+                        <a:t>2%</a:t>
                       </a:r>
                       <a:endParaRPr lang="en-US" sz="1000" dirty="0">
                         <a:latin typeface="Pretendard SemiBold" charset="0"/>
@@ -14632,7 +14230,7 @@
                 <a:ea typeface="Pretendard SemiBold" pitchFamily="34" charset="-122"/>
                 <a:cs typeface="Pretendard SemiBold" pitchFamily="34" charset="-120"/>
               </a:rPr>
-              <a:t>로트 수·건당 시간은 가정값. </a:t>
+              <a:t>판매자가 고친 값이 </a:t>
             </a:r>
             <a:r>
               <a:rPr lang="en-US" sz="1250" dirty="0">
@@ -14643,7 +14241,7 @@
                 <a:ea typeface="Pretendard SemiBold" pitchFamily="34" charset="-122"/>
                 <a:cs typeface="Pretendard SemiBold" pitchFamily="34" charset="-120"/>
               </a:rPr>
-              <a:t>확인 건당 8초와 불일치율은 우리가 직접 잰 값</a:t>
+              <a:t>공짜 라벨</a:t>
             </a:r>
             <a:r>
               <a:rPr lang="en-US" sz="1250" dirty="0">
@@ -14654,7 +14252,7 @@
                 <a:ea typeface="Pretendard SemiBold" pitchFamily="34" charset="-122"/>
                 <a:cs typeface="Pretendard SemiBold" pitchFamily="34" charset="-120"/>
               </a:rPr>
-              <a:t> 이다</a:t>
+              <a:t> 이 되어, 쓸수록 자동 입력 비율이 오른다</a:t>
             </a:r>
             <a:endParaRPr lang="en-US" sz="1250" dirty="0"/>
           </a:p>
@@ -14762,7 +14360,7 @@
                 <a:ea typeface="Pretendard SemiBold" pitchFamily="34" charset="-122"/>
                 <a:cs typeface="Pretendard SemiBold" pitchFamily="34" charset="-120"/>
               </a:rPr>
-              <a:t>직접 찍은 새 사진에서는 52%</a:t>
+              <a:t>판매자 폰 사진에서는 52%</a:t>
             </a:r>
             <a:endParaRPr lang="en-US" sz="1900" dirty="0"/>
           </a:p>
@@ -15015,7 +14613,7 @@
                 <a:ea typeface="Pretendard SemiBold" pitchFamily="34" charset="-122"/>
                 <a:cs typeface="Pretendard SemiBold" pitchFamily="34" charset="-120"/>
               </a:rPr>
-              <a:t>도트 인쇄·각인 : 규칙으로는 끝. 인식기 학습 데이터가 답</a:t>
+              <a:t>남은 날을 많게 읽는 경우 4.9% (중앙 +63일) → 제품 유형별 최대 기한을 넘으면 판독 불가</a:t>
             </a:r>
             <a:endParaRPr lang="en-US" sz="1050" dirty="0"/>
           </a:p>
@@ -15036,7 +14634,7 @@
                 <a:ea typeface="Pretendard SemiBold" pitchFamily="34" charset="-122"/>
                 <a:cs typeface="Pretendard SemiBold" pitchFamily="34" charset="-120"/>
               </a:rPr>
-              <a:t>작은 사진 (전체의 33%) : 글자 8~12픽셀, 확대·해상도 상향 모두 효과 없음</a:t>
+              <a:t>스티커 위조·다른 상품 촬영은 못 막는다 → 사후 모니터링 몫</a:t>
             </a:r>
             <a:endParaRPr lang="en-US" sz="1050" dirty="0"/>
           </a:p>
@@ -15057,7 +14655,7 @@
                 <a:ea typeface="Pretendard SemiBold" pitchFamily="34" charset="-122"/>
                 <a:cs typeface="Pretendard SemiBold" pitchFamily="34" charset="-120"/>
               </a:rPr>
-              <a:t>제조일자만 있는 사진 (정답 NONE) : 한글 단서가 필요해 미지원, 0.5% 미만</a:t>
+              <a:t>선물세트는 날짜가 여러 개 → 상품별로 찍고 가장 이른 날짜를 표시</a:t>
             </a:r>
             <a:endParaRPr lang="en-US" sz="1050" dirty="0"/>
           </a:p>
@@ -15199,7 +14797,7 @@
                 <a:ea typeface="Pretendard SemiBold" pitchFamily="34" charset="-122"/>
                 <a:cs typeface="Pretendard SemiBold" pitchFamily="34" charset="-120"/>
               </a:rPr>
-              <a:t>촬영 단계에서 막는다</a:t>
+              <a:t>확신할 때만 채운다</a:t>
             </a:r>
             <a:endParaRPr lang="en-US" sz="1150" dirty="0"/>
           </a:p>
@@ -15238,7 +14836,7 @@
                 <a:ea typeface="Pretendard SemiBold" pitchFamily="34" charset="-122"/>
                 <a:cs typeface="Pretendard SemiBold" pitchFamily="34" charset="-120"/>
               </a:rPr>
-              <a:t>"날짜를 가운데, 가까이" 가이드와 반사 감지 재촬영</a:t>
+              <a:t>빈칸이면 지금처럼 손으로 입력. 손해가 없다</a:t>
             </a:r>
             <a:endParaRPr lang="en-US" sz="1000" dirty="0"/>
           </a:p>
@@ -15341,7 +14939,7 @@
                 <a:ea typeface="Pretendard SemiBold" pitchFamily="34" charset="-122"/>
                 <a:cs typeface="Pretendard SemiBold" pitchFamily="34" charset="-120"/>
               </a:rPr>
-              <a:t>어려운 크롭을 사람이 고른다</a:t>
+              <a:t>판매자 수정값으로 재학습</a:t>
             </a:r>
             <a:endParaRPr lang="en-US" sz="1150" dirty="0"/>
           </a:p>
@@ -15380,7 +14978,7 @@
                 <a:ea typeface="Pretendard SemiBold" pitchFamily="34" charset="-122"/>
                 <a:cs typeface="Pretendard SemiBold" pitchFamily="34" charset="-120"/>
               </a:rPr>
-              <a:t>미인식 사진의 날짜 줄을 검수해 재학습</a:t>
+              <a:t>고칠 때마다 라벨이 생겨 자동 입력 비율 상승</a:t>
             </a:r>
             <a:endParaRPr lang="en-US" sz="1000" dirty="0"/>
           </a:p>
@@ -15483,7 +15081,7 @@
                 <a:ea typeface="Pretendard SemiBold" pitchFamily="34" charset="-122"/>
                 <a:cs typeface="Pretendard SemiBold" pitchFamily="34" charset="-120"/>
               </a:rPr>
-              <a:t>경고를 붙인다</a:t>
+              <a:t>차단 대신 안내</a:t>
             </a:r>
             <a:endParaRPr lang="en-US" sz="1150" dirty="0"/>
           </a:p>
@@ -15522,7 +15120,7 @@
                 <a:ea typeface="Pretendard SemiBold" pitchFamily="34" charset="-122"/>
                 <a:cs typeface="Pretendard SemiBold" pitchFamily="34" charset="-120"/>
               </a:rPr>
-              <a:t>답은 바꾸지 않고 의심 신호에 사람 확인 표시</a:t>
+              <a:t>재확인만 요청하고 최종 판단은 기존 검토에</a:t>
             </a:r>
             <a:endParaRPr lang="en-US" sz="1000" dirty="0"/>
           </a:p>
@@ -15610,7 +15208,7 @@
                 <a:ea typeface="Pretendard SemiBold" pitchFamily="34" charset="-122"/>
                 <a:cs typeface="Pretendard SemiBold" pitchFamily="34" charset="-120"/>
               </a:rPr>
-              <a:t> : 무엇을 어떻게 찍느냐가 정확도를 크게 좌우한다</a:t>
+              <a:t> : 촬영 안내(날짜를 가운데, 가까이)가 정확도를 좌우한다</a:t>
             </a:r>
             <a:endParaRPr lang="en-US" sz="1250" dirty="0"/>
           </a:p>
@@ -15816,14 +15414,14 @@
                     </a:ext>
                   </a:extLst>
                 </a:gridCol>
-                <a:gridCol w="1828800">
+                <a:gridCol w="1645920">
                   <a:extLst>
                     <a:ext uri="{9D8B030D-6E8A-4147-A177-3AD203B41FA5}">
                       <a16:colId xmlns:a16="http://schemas.microsoft.com/office/drawing/2014/main" val="20001"/>
                     </a:ext>
                   </a:extLst>
                 </a:gridCol>
-                <a:gridCol w="2011680">
+                <a:gridCol w="2194560">
                   <a:extLst>
                     <a:ext uri="{9D8B030D-6E8A-4147-A177-3AD203B41FA5}">
                       <a16:colId xmlns:a16="http://schemas.microsoft.com/office/drawing/2014/main" val="20002"/>
@@ -15848,7 +15446,7 @@
                         <a:buNone/>
                       </a:pPr>
                       <a:r>
-                        <a:rPr lang="en-US" sz="1030" dirty="0">
+                        <a:rPr lang="en-US" sz="1010" dirty="0">
                           <a:solidFill>
                             <a:srgbClr val="FFFFFF"/>
                           </a:solidFill>
@@ -15858,7 +15456,7 @@
                         </a:rPr>
                         <a:t>적용 분야</a:t>
                       </a:r>
-                      <a:endParaRPr lang="en-US" sz="1030" dirty="0">
+                      <a:endParaRPr lang="en-US" sz="1010" dirty="0">
                         <a:latin typeface="Pretendard SemiBold" charset="0"/>
                         <a:ea typeface="Pretendard SemiBold" charset="0"/>
                         <a:cs typeface="Pretendard SemiBold" charset="0"/>
@@ -15916,7 +15514,7 @@
                         <a:buNone/>
                       </a:pPr>
                       <a:r>
-                        <a:rPr lang="en-US" sz="1030" dirty="0">
+                        <a:rPr lang="en-US" sz="1010" dirty="0">
                           <a:solidFill>
                             <a:srgbClr val="FFFFFF"/>
                           </a:solidFill>
@@ -15926,7 +15524,7 @@
                         </a:rPr>
                         <a:t>읽는 값</a:t>
                       </a:r>
-                      <a:endParaRPr lang="en-US" sz="1030" dirty="0">
+                      <a:endParaRPr lang="en-US" sz="1010" dirty="0">
                         <a:latin typeface="Pretendard SemiBold" charset="0"/>
                         <a:ea typeface="Pretendard SemiBold" charset="0"/>
                         <a:cs typeface="Pretendard SemiBold" charset="0"/>
@@ -15984,7 +15582,7 @@
                         <a:buNone/>
                       </a:pPr>
                       <a:r>
-                        <a:rPr lang="en-US" sz="1030" dirty="0">
+                        <a:rPr lang="en-US" sz="1010" dirty="0">
                           <a:solidFill>
                             <a:srgbClr val="FFFFFF"/>
                           </a:solidFill>
@@ -15994,7 +15592,7 @@
                         </a:rPr>
                         <a:t>바꿀 것</a:t>
                       </a:r>
-                      <a:endParaRPr lang="en-US" sz="1030" dirty="0">
+                      <a:endParaRPr lang="en-US" sz="1010" dirty="0">
                         <a:latin typeface="Pretendard SemiBold" charset="0"/>
                         <a:ea typeface="Pretendard SemiBold" charset="0"/>
                         <a:cs typeface="Pretendard SemiBold" charset="0"/>
@@ -16052,7 +15650,7 @@
                         <a:buNone/>
                       </a:pPr>
                       <a:r>
-                        <a:rPr lang="en-US" sz="1030" dirty="0">
+                        <a:rPr lang="en-US" sz="1010" dirty="0">
                           <a:solidFill>
                             <a:srgbClr val="FFFFFF"/>
                           </a:solidFill>
@@ -16062,7 +15660,7 @@
                         </a:rPr>
                         <a:t>그대로 쓰는 것</a:t>
                       </a:r>
-                      <a:endParaRPr lang="en-US" sz="1030" dirty="0">
+                      <a:endParaRPr lang="en-US" sz="1010" dirty="0">
                         <a:latin typeface="Pretendard SemiBold" charset="0"/>
                         <a:ea typeface="Pretendard SemiBold" charset="0"/>
                         <a:cs typeface="Pretendard SemiBold" charset="0"/>
@@ -16127,7 +15725,7 @@
                         <a:buNone/>
                       </a:pPr>
                       <a:r>
-                        <a:rPr lang="en-US" sz="1030" dirty="0">
+                        <a:rPr lang="en-US" sz="1010" dirty="0">
                           <a:solidFill>
                             <a:srgbClr val="1A1A1A"/>
                           </a:solidFill>
@@ -16135,9 +15733,9 @@
                           <a:ea typeface="Pretendard SemiBold" pitchFamily="34" charset="-122"/>
                           <a:cs typeface="Pretendard SemiBold" pitchFamily="34" charset="-120"/>
                         </a:rPr>
-                        <a:t>의약품·화학 제품 출하 표시물 검증</a:t>
+                        <a:t>가공식품 · 명절 선물세트 카테고리</a:t>
                       </a:r>
-                      <a:endParaRPr lang="en-US" sz="1030" dirty="0">
+                      <a:endParaRPr lang="en-US" sz="1010" dirty="0">
                         <a:latin typeface="Pretendard SemiBold" charset="0"/>
                         <a:ea typeface="Pretendard SemiBold" charset="0"/>
                         <a:cs typeface="Pretendard SemiBold" charset="0"/>
@@ -16195,7 +15793,7 @@
                         <a:buNone/>
                       </a:pPr>
                       <a:r>
-                        <a:rPr lang="en-US" sz="1030" dirty="0">
+                        <a:rPr lang="en-US" sz="1010" dirty="0">
                           <a:solidFill>
                             <a:srgbClr val="1A1A1A"/>
                           </a:solidFill>
@@ -16203,9 +15801,9 @@
                           <a:ea typeface="Pretendard SemiBold" pitchFamily="34" charset="-122"/>
                           <a:cs typeface="Pretendard SemiBold" pitchFamily="34" charset="-120"/>
                         </a:rPr>
-                        <a:t>제조번호 · 사용기한</a:t>
+                        <a:t>소비기한</a:t>
                       </a:r>
-                      <a:endParaRPr lang="en-US" sz="1030" dirty="0">
+                      <a:endParaRPr lang="en-US" sz="1010" dirty="0">
                         <a:latin typeface="Pretendard SemiBold" charset="0"/>
                         <a:ea typeface="Pretendard SemiBold" charset="0"/>
                         <a:cs typeface="Pretendard SemiBold" charset="0"/>
@@ -16263,7 +15861,7 @@
                         <a:buNone/>
                       </a:pPr>
                       <a:r>
-                        <a:rPr lang="en-US" sz="1030" dirty="0">
+                        <a:rPr lang="en-US" sz="1010" dirty="0">
                           <a:solidFill>
                             <a:srgbClr val="1A1A1A"/>
                           </a:solidFill>
@@ -16271,9 +15869,9 @@
                           <a:ea typeface="Pretendard SemiBold" pitchFamily="34" charset="-122"/>
                           <a:cs typeface="Pretendard SemiBold" pitchFamily="34" charset="-120"/>
                         </a:rPr>
-                        <a:t>표기 형식 규칙</a:t>
+                        <a:t>대상 카테고리, 상품별 촬영</a:t>
                       </a:r>
-                      <a:endParaRPr lang="en-US" sz="1030" dirty="0">
+                      <a:endParaRPr lang="en-US" sz="1010" dirty="0">
                         <a:latin typeface="Pretendard SemiBold" charset="0"/>
                         <a:ea typeface="Pretendard SemiBold" charset="0"/>
                         <a:cs typeface="Pretendard SemiBold" charset="0"/>
@@ -16331,7 +15929,7 @@
                         <a:buNone/>
                       </a:pPr>
                       <a:r>
-                        <a:rPr lang="en-US" sz="1030" dirty="0">
+                        <a:rPr lang="en-US" sz="1010" dirty="0">
                           <a:solidFill>
                             <a:srgbClr val="1A1A1A"/>
                           </a:solidFill>
@@ -16339,9 +15937,9 @@
                           <a:ea typeface="Pretendard SemiBold" pitchFamily="34" charset="-122"/>
                           <a:cs typeface="Pretendard SemiBold" pitchFamily="34" charset="-120"/>
                         </a:rPr>
-                        <a:t>읽기 · 신고값 대조 · 예외 처리</a:t>
+                        <a:t>파이프라인 전체</a:t>
                       </a:r>
-                      <a:endParaRPr lang="en-US" sz="1030" dirty="0">
+                      <a:endParaRPr lang="en-US" sz="1010" dirty="0">
                         <a:latin typeface="Pretendard SemiBold" charset="0"/>
                         <a:ea typeface="Pretendard SemiBold" charset="0"/>
                         <a:cs typeface="Pretendard SemiBold" charset="0"/>
@@ -16406,7 +16004,7 @@
                         <a:buNone/>
                       </a:pPr>
                       <a:r>
-                        <a:rPr lang="en-US" sz="1030" dirty="0">
+                        <a:rPr lang="en-US" sz="1010" dirty="0">
                           <a:solidFill>
                             <a:srgbClr val="1A1A1A"/>
                           </a:solidFill>
@@ -16414,9 +16012,9 @@
                           <a:ea typeface="Pretendard SemiBold" pitchFamily="34" charset="-122"/>
                           <a:cs typeface="Pretendard SemiBold" pitchFamily="34" charset="-120"/>
                         </a:rPr>
-                        <a:t>온라인 식품 발송 시점 기한 검증</a:t>
+                        <a:t>품목보고번호 인식 → 제품 조회·회수 확인</a:t>
                       </a:r>
-                      <a:endParaRPr lang="en-US" sz="1030" dirty="0">
+                      <a:endParaRPr lang="en-US" sz="1010" dirty="0">
                         <a:latin typeface="Pretendard SemiBold" charset="0"/>
                         <a:ea typeface="Pretendard SemiBold" charset="0"/>
                         <a:cs typeface="Pretendard SemiBold" charset="0"/>
@@ -16474,7 +16072,7 @@
                         <a:buNone/>
                       </a:pPr>
                       <a:r>
-                        <a:rPr lang="en-US" sz="1030" dirty="0">
+                        <a:rPr lang="en-US" sz="1010" dirty="0">
                           <a:solidFill>
                             <a:srgbClr val="1A1A1A"/>
                           </a:solidFill>
@@ -16482,9 +16080,9 @@
                           <a:ea typeface="Pretendard SemiBold" pitchFamily="34" charset="-122"/>
                           <a:cs typeface="Pretendard SemiBold" pitchFamily="34" charset="-120"/>
                         </a:rPr>
-                        <a:t>소비기한</a:t>
+                        <a:t>품목보고번호</a:t>
                       </a:r>
-                      <a:endParaRPr lang="en-US" sz="1030" dirty="0">
+                      <a:endParaRPr lang="en-US" sz="1010" dirty="0">
                         <a:latin typeface="Pretendard SemiBold" charset="0"/>
                         <a:ea typeface="Pretendard SemiBold" charset="0"/>
                         <a:cs typeface="Pretendard SemiBold" charset="0"/>
@@ -16542,7 +16140,7 @@
                         <a:buNone/>
                       </a:pPr>
                       <a:r>
-                        <a:rPr lang="en-US" sz="1030" dirty="0">
+                        <a:rPr lang="en-US" sz="1010" dirty="0">
                           <a:solidFill>
                             <a:srgbClr val="1A1A1A"/>
                           </a:solidFill>
@@ -16550,9 +16148,9 @@
                           <a:ea typeface="Pretendard SemiBold" pitchFamily="34" charset="-122"/>
                           <a:cs typeface="Pretendard SemiBold" pitchFamily="34" charset="-120"/>
                         </a:rPr>
-                        <a:t>대조 대상 (판매 페이지 약속)</a:t>
+                        <a:t>9자리 숫자 마스킹 규칙 재설계</a:t>
                       </a:r>
-                      <a:endParaRPr lang="en-US" sz="1030" dirty="0">
+                      <a:endParaRPr lang="en-US" sz="1010" dirty="0">
                         <a:latin typeface="Pretendard SemiBold" charset="0"/>
                         <a:ea typeface="Pretendard SemiBold" charset="0"/>
                         <a:cs typeface="Pretendard SemiBold" charset="0"/>
@@ -16610,7 +16208,7 @@
                         <a:buNone/>
                       </a:pPr>
                       <a:r>
-                        <a:rPr lang="en-US" sz="1030" dirty="0">
+                        <a:rPr lang="en-US" sz="1010" dirty="0">
                           <a:solidFill>
                             <a:srgbClr val="1A1A1A"/>
                           </a:solidFill>
@@ -16618,9 +16216,9 @@
                           <a:ea typeface="Pretendard SemiBold" pitchFamily="34" charset="-122"/>
                           <a:cs typeface="Pretendard SemiBold" pitchFamily="34" charset="-120"/>
                         </a:rPr>
-                        <a:t>파이프라인 전체</a:t>
+                        <a:t>탐지 · 인식 (정확도 미측정)</a:t>
                       </a:r>
-                      <a:endParaRPr lang="en-US" sz="1030" dirty="0">
+                      <a:endParaRPr lang="en-US" sz="1010" dirty="0">
                         <a:latin typeface="Pretendard SemiBold" charset="0"/>
                         <a:ea typeface="Pretendard SemiBold" charset="0"/>
                         <a:cs typeface="Pretendard SemiBold" charset="0"/>
@@ -16685,7 +16283,7 @@
                         <a:buNone/>
                       </a:pPr>
                       <a:r>
-                        <a:rPr lang="en-US" sz="1030" dirty="0">
+                        <a:rPr lang="en-US" sz="1010" dirty="0">
                           <a:solidFill>
                             <a:srgbClr val="1A1A1A"/>
                           </a:solidFill>
@@ -16693,9 +16291,9 @@
                           <a:ea typeface="Pretendard SemiBold" pitchFamily="34" charset="-122"/>
                           <a:cs typeface="Pretendard SemiBold" pitchFamily="34" charset="-120"/>
                         </a:rPr>
-                        <a:t>단체급식 식재료 검수일지</a:t>
+                        <a:t>제조 현장 출하 전 날짜 인쇄 확인</a:t>
                       </a:r>
-                      <a:endParaRPr lang="en-US" sz="1030" dirty="0">
+                      <a:endParaRPr lang="en-US" sz="1010" dirty="0">
                         <a:latin typeface="Pretendard SemiBold" charset="0"/>
                         <a:ea typeface="Pretendard SemiBold" charset="0"/>
                         <a:cs typeface="Pretendard SemiBold" charset="0"/>
@@ -16753,7 +16351,7 @@
                         <a:buNone/>
                       </a:pPr>
                       <a:r>
-                        <a:rPr lang="en-US" sz="1030" dirty="0">
+                        <a:rPr lang="en-US" sz="1010" dirty="0">
                           <a:solidFill>
                             <a:srgbClr val="1A1A1A"/>
                           </a:solidFill>
@@ -16763,7 +16361,7 @@
                         </a:rPr>
                         <a:t>소비기한</a:t>
                       </a:r>
-                      <a:endParaRPr lang="en-US" sz="1030" dirty="0">
+                      <a:endParaRPr lang="en-US" sz="1010" dirty="0">
                         <a:latin typeface="Pretendard SemiBold" charset="0"/>
                         <a:ea typeface="Pretendard SemiBold" charset="0"/>
                         <a:cs typeface="Pretendard SemiBold" charset="0"/>
@@ -16821,7 +16419,7 @@
                         <a:buNone/>
                       </a:pPr>
                       <a:r>
-                        <a:rPr lang="en-US" sz="1030" dirty="0">
+                        <a:rPr lang="en-US" sz="1010" dirty="0">
                           <a:solidFill>
                             <a:srgbClr val="1A1A1A"/>
                           </a:solidFill>
@@ -16829,9 +16427,9 @@
                           <a:ea typeface="Pretendard SemiBold" pitchFamily="34" charset="-122"/>
                           <a:cs typeface="Pretendard SemiBold" pitchFamily="34" charset="-120"/>
                         </a:rPr>
-                        <a:t>출력 양식 (검수일지)</a:t>
+                        <a:t>대조 대상 (공장의 기대값)</a:t>
                       </a:r>
-                      <a:endParaRPr lang="en-US" sz="1030" dirty="0">
+                      <a:endParaRPr lang="en-US" sz="1010" dirty="0">
                         <a:latin typeface="Pretendard SemiBold" charset="0"/>
                         <a:ea typeface="Pretendard SemiBold" charset="0"/>
                         <a:cs typeface="Pretendard SemiBold" charset="0"/>
@@ -16889,7 +16487,7 @@
                         <a:buNone/>
                       </a:pPr>
                       <a:r>
-                        <a:rPr lang="en-US" sz="1030" dirty="0">
+                        <a:rPr lang="en-US" sz="1010" dirty="0">
                           <a:solidFill>
                             <a:srgbClr val="1A1A1A"/>
                           </a:solidFill>
@@ -16899,7 +16497,7 @@
                         </a:rPr>
                         <a:t>파이프라인 전체</a:t>
                       </a:r>
-                      <a:endParaRPr lang="en-US" sz="1030" dirty="0">
+                      <a:endParaRPr lang="en-US" sz="1010" dirty="0">
                         <a:latin typeface="Pretendard SemiBold" charset="0"/>
                         <a:ea typeface="Pretendard SemiBold" charset="0"/>
                         <a:cs typeface="Pretendard SemiBold" charset="0"/>
@@ -16964,7 +16562,7 @@
                         <a:buNone/>
                       </a:pPr>
                       <a:r>
-                        <a:rPr lang="en-US" sz="1030" dirty="0">
+                        <a:rPr lang="en-US" sz="1010" dirty="0">
                           <a:solidFill>
                             <a:srgbClr val="1A1A1A"/>
                           </a:solidFill>
@@ -16972,9 +16570,9 @@
                           <a:ea typeface="Pretendard SemiBold" pitchFamily="34" charset="-122"/>
                           <a:cs typeface="Pretendard SemiBold" pitchFamily="34" charset="-120"/>
                         </a:rPr>
-                        <a:t>고압가스 용기 · 소화기 점검</a:t>
+                        <a:t>의약품 · 화학 제품 출하 표시물</a:t>
                       </a:r>
-                      <a:endParaRPr lang="en-US" sz="1030" dirty="0">
+                      <a:endParaRPr lang="en-US" sz="1010" dirty="0">
                         <a:latin typeface="Pretendard SemiBold" charset="0"/>
                         <a:ea typeface="Pretendard SemiBold" charset="0"/>
                         <a:cs typeface="Pretendard SemiBold" charset="0"/>
@@ -17032,7 +16630,7 @@
                         <a:buNone/>
                       </a:pPr>
                       <a:r>
-                        <a:rPr lang="en-US" sz="1030" dirty="0">
+                        <a:rPr lang="en-US" sz="1010" dirty="0">
                           <a:solidFill>
                             <a:srgbClr val="1A1A1A"/>
                           </a:solidFill>
@@ -17040,9 +16638,9 @@
                           <a:ea typeface="Pretendard SemiBold" pitchFamily="34" charset="-122"/>
                           <a:cs typeface="Pretendard SemiBold" pitchFamily="34" charset="-120"/>
                         </a:rPr>
-                        <a:t>재검사 기한 · 제조연월</a:t>
+                        <a:t>제조번호 · 사용기한</a:t>
                       </a:r>
-                      <a:endParaRPr lang="en-US" sz="1030" dirty="0">
+                      <a:endParaRPr lang="en-US" sz="1010" dirty="0">
                         <a:latin typeface="Pretendard SemiBold" charset="0"/>
                         <a:ea typeface="Pretendard SemiBold" charset="0"/>
                         <a:cs typeface="Pretendard SemiBold" charset="0"/>
@@ -17100,7 +16698,7 @@
                         <a:buNone/>
                       </a:pPr>
                       <a:r>
-                        <a:rPr lang="en-US" sz="1030" dirty="0">
+                        <a:rPr lang="en-US" sz="1010" dirty="0">
                           <a:solidFill>
                             <a:srgbClr val="1A1A1A"/>
                           </a:solidFill>
@@ -17108,9 +16706,9 @@
                           <a:ea typeface="Pretendard SemiBold" pitchFamily="34" charset="-122"/>
                           <a:cs typeface="Pretendard SemiBold" pitchFamily="34" charset="-120"/>
                         </a:rPr>
-                        <a:t>형식 규칙, 각인 전처리</a:t>
+                        <a:t>표기 형식 규칙</a:t>
                       </a:r>
-                      <a:endParaRPr lang="en-US" sz="1030" dirty="0">
+                      <a:endParaRPr lang="en-US" sz="1010" dirty="0">
                         <a:latin typeface="Pretendard SemiBold" charset="0"/>
                         <a:ea typeface="Pretendard SemiBold" charset="0"/>
                         <a:cs typeface="Pretendard SemiBold" charset="0"/>
@@ -17168,7 +16766,7 @@
                         <a:buNone/>
                       </a:pPr>
                       <a:r>
-                        <a:rPr lang="en-US" sz="1030" dirty="0">
+                        <a:rPr lang="en-US" sz="1010" dirty="0">
                           <a:solidFill>
                             <a:srgbClr val="1A1A1A"/>
                           </a:solidFill>
@@ -17176,9 +16774,9 @@
                           <a:ea typeface="Pretendard SemiBold" pitchFamily="34" charset="-122"/>
                           <a:cs typeface="Pretendard SemiBold" pitchFamily="34" charset="-120"/>
                         </a:rPr>
-                        <a:t>탐지 · 폴백 구조</a:t>
+                        <a:t>읽기 · 대조 · 예외 처리</a:t>
                       </a:r>
-                      <a:endParaRPr lang="en-US" sz="1030" dirty="0">
+                      <a:endParaRPr lang="en-US" sz="1010" dirty="0">
                         <a:latin typeface="Pretendard SemiBold" charset="0"/>
                         <a:ea typeface="Pretendard SemiBold" charset="0"/>
                         <a:cs typeface="Pretendard SemiBold" charset="0"/>
@@ -17382,7 +16980,7 @@
                 <a:ea typeface="Pretendard SemiBold" pitchFamily="34" charset="-122"/>
                 <a:cs typeface="Pretendard SemiBold" pitchFamily="34" charset="-120"/>
               </a:rPr>
-              <a:t>사람이 확정한 값이 다시 학습 데이터가 되는 순환 구조</a:t>
+              <a:t>사람(판매자·검수자)이 확정한 값이 다시 학습 데이터가 되는 순환 구조</a:t>
             </a:r>
             <a:endParaRPr lang="en-US" sz="1080" dirty="0"/>
           </a:p>
@@ -18196,7 +17794,7 @@
                 <a:ea typeface="Pretendard SemiBold" pitchFamily="34" charset="-122"/>
                 <a:cs typeface="Pretendard SemiBold" pitchFamily="34" charset="-120"/>
               </a:rPr>
-              <a:t>확신이 없으면 NONE. 현장에서는 정확도가 안전성이 아니라 자동화율이 된다</a:t>
+              <a:t>확신이 없으면 NONE, 판매자가 직접 입력. 정확도는 안전성이 아니라 자동 입력 비율이 된다</a:t>
             </a:r>
             <a:endParaRPr lang="en-US" sz="1150" dirty="0"/>
           </a:p>

--- a/발표/[CODE]_서브웨이_본선발표.pptx
+++ b/발표/[CODE]_서브웨이_본선발표.pptx
@@ -180,7 +180,7 @@
             <c:bubble3D val="0"/>
             <c:extLst>
               <c:ext xmlns:c16="http://schemas.microsoft.com/office/drawing/2014/chart" uri="{C3380CC4-5D6E-409C-BE32-E72D297353CC}">
-                <c16:uniqueId val="{00000001-0290-4377-9707-2E9A9D4400B0}"/>
+                <c16:uniqueId val="{00000001-89C6-4B0D-AAAD-DBF973C45571}"/>
               </c:ext>
             </c:extLst>
           </c:dPt>
@@ -190,7 +190,7 @@
             <c:bubble3D val="0"/>
             <c:extLst>
               <c:ext xmlns:c16="http://schemas.microsoft.com/office/drawing/2014/chart" uri="{C3380CC4-5D6E-409C-BE32-E72D297353CC}">
-                <c16:uniqueId val="{00000003-0290-4377-9707-2E9A9D4400B0}"/>
+                <c16:uniqueId val="{00000003-89C6-4B0D-AAAD-DBF973C45571}"/>
               </c:ext>
             </c:extLst>
           </c:dPt>
@@ -200,7 +200,7 @@
             <c:bubble3D val="0"/>
             <c:extLst>
               <c:ext xmlns:c16="http://schemas.microsoft.com/office/drawing/2014/chart" uri="{C3380CC4-5D6E-409C-BE32-E72D297353CC}">
-                <c16:uniqueId val="{00000005-0290-4377-9707-2E9A9D4400B0}"/>
+                <c16:uniqueId val="{00000005-89C6-4B0D-AAAD-DBF973C45571}"/>
               </c:ext>
             </c:extLst>
           </c:dPt>
@@ -210,7 +210,7 @@
             <c:bubble3D val="0"/>
             <c:extLst>
               <c:ext xmlns:c16="http://schemas.microsoft.com/office/drawing/2014/chart" uri="{C3380CC4-5D6E-409C-BE32-E72D297353CC}">
-                <c16:uniqueId val="{00000007-0290-4377-9707-2E9A9D4400B0}"/>
+                <c16:uniqueId val="{00000007-89C6-4B0D-AAAD-DBF973C45571}"/>
               </c:ext>
             </c:extLst>
           </c:dPt>
@@ -220,7 +220,7 @@
             <c:bubble3D val="0"/>
             <c:extLst>
               <c:ext xmlns:c16="http://schemas.microsoft.com/office/drawing/2014/chart" uri="{C3380CC4-5D6E-409C-BE32-E72D297353CC}">
-                <c16:uniqueId val="{00000009-0290-4377-9707-2E9A9D4400B0}"/>
+                <c16:uniqueId val="{00000009-89C6-4B0D-AAAD-DBF973C45571}"/>
               </c:ext>
             </c:extLst>
           </c:dPt>
@@ -230,7 +230,7 @@
             <c:bubble3D val="0"/>
             <c:extLst>
               <c:ext xmlns:c16="http://schemas.microsoft.com/office/drawing/2014/chart" uri="{C3380CC4-5D6E-409C-BE32-E72D297353CC}">
-                <c16:uniqueId val="{0000000B-0290-4377-9707-2E9A9D4400B0}"/>
+                <c16:uniqueId val="{0000000B-89C6-4B0D-AAAD-DBF973C45571}"/>
               </c:ext>
             </c:extLst>
           </c:dPt>
@@ -240,7 +240,7 @@
             <c:bubble3D val="0"/>
             <c:extLst>
               <c:ext xmlns:c16="http://schemas.microsoft.com/office/drawing/2014/chart" uri="{C3380CC4-5D6E-409C-BE32-E72D297353CC}">
-                <c16:uniqueId val="{0000000D-0290-4377-9707-2E9A9D4400B0}"/>
+                <c16:uniqueId val="{0000000D-89C6-4B0D-AAAD-DBF973C45571}"/>
               </c:ext>
             </c:extLst>
           </c:dPt>
@@ -250,7 +250,7 @@
             <c:bubble3D val="0"/>
             <c:extLst>
               <c:ext xmlns:c16="http://schemas.microsoft.com/office/drawing/2014/chart" uri="{C3380CC4-5D6E-409C-BE32-E72D297353CC}">
-                <c16:uniqueId val="{0000000F-0290-4377-9707-2E9A9D4400B0}"/>
+                <c16:uniqueId val="{0000000F-89C6-4B0D-AAAD-DBF973C45571}"/>
               </c:ext>
             </c:extLst>
           </c:dPt>
@@ -260,7 +260,7 @@
             <c:bubble3D val="0"/>
             <c:extLst>
               <c:ext xmlns:c16="http://schemas.microsoft.com/office/drawing/2014/chart" uri="{C3380CC4-5D6E-409C-BE32-E72D297353CC}">
-                <c16:uniqueId val="{00000011-0290-4377-9707-2E9A9D4400B0}"/>
+                <c16:uniqueId val="{00000011-89C6-4B0D-AAAD-DBF973C45571}"/>
               </c:ext>
             </c:extLst>
           </c:dPt>
@@ -276,7 +276,7 @@
             </c:spPr>
             <c:extLst>
               <c:ext xmlns:c16="http://schemas.microsoft.com/office/drawing/2014/chart" uri="{C3380CC4-5D6E-409C-BE32-E72D297353CC}">
-                <c16:uniqueId val="{00000013-0290-4377-9707-2E9A9D4400B0}"/>
+                <c16:uniqueId val="{00000013-89C6-4B0D-AAAD-DBF973C45571}"/>
               </c:ext>
             </c:extLst>
           </c:dPt>
@@ -292,7 +292,7 @@
             </c:spPr>
             <c:extLst>
               <c:ext xmlns:c16="http://schemas.microsoft.com/office/drawing/2014/chart" uri="{C3380CC4-5D6E-409C-BE32-E72D297353CC}">
-                <c16:uniqueId val="{00000015-0290-4377-9707-2E9A9D4400B0}"/>
+                <c16:uniqueId val="{00000015-89C6-4B0D-AAAD-DBF973C45571}"/>
               </c:ext>
             </c:extLst>
           </c:dPt>
@@ -418,7 +418,7 @@
           </c:val>
           <c:extLst>
             <c:ext xmlns:c16="http://schemas.microsoft.com/office/drawing/2014/chart" uri="{C3380CC4-5D6E-409C-BE32-E72D297353CC}">
-              <c16:uniqueId val="{00000016-0290-4377-9707-2E9A9D4400B0}"/>
+              <c16:uniqueId val="{00000016-89C6-4B0D-AAAD-DBF973C45571}"/>
             </c:ext>
           </c:extLst>
         </c:ser>
@@ -594,7 +594,7 @@
             <c:bubble3D val="0"/>
             <c:extLst>
               <c:ext xmlns:c16="http://schemas.microsoft.com/office/drawing/2014/chart" uri="{C3380CC4-5D6E-409C-BE32-E72D297353CC}">
-                <c16:uniqueId val="{00000001-EC68-4920-89A4-C2DB676C45D7}"/>
+                <c16:uniqueId val="{00000001-4B6C-47A5-AE47-3CC16AD9C256}"/>
               </c:ext>
             </c:extLst>
           </c:dPt>
@@ -610,7 +610,7 @@
             </c:spPr>
             <c:extLst>
               <c:ext xmlns:c16="http://schemas.microsoft.com/office/drawing/2014/chart" uri="{C3380CC4-5D6E-409C-BE32-E72D297353CC}">
-                <c16:uniqueId val="{00000003-EC68-4920-89A4-C2DB676C45D7}"/>
+                <c16:uniqueId val="{00000003-4B6C-47A5-AE47-3CC16AD9C256}"/>
               </c:ext>
             </c:extLst>
           </c:dPt>
@@ -682,7 +682,7 @@
           </c:val>
           <c:extLst>
             <c:ext xmlns:c16="http://schemas.microsoft.com/office/drawing/2014/chart" uri="{C3380CC4-5D6E-409C-BE32-E72D297353CC}">
-              <c16:uniqueId val="{00000004-EC68-4920-89A4-C2DB676C45D7}"/>
+              <c16:uniqueId val="{00000004-4B6C-47A5-AE47-3CC16AD9C256}"/>
             </c:ext>
           </c:extLst>
         </c:ser>
@@ -807,7 +807,7 @@
     </p:spTree>
     <p:extLst>
       <p:ext uri="{BB962C8B-B14F-4D97-AF65-F5344CB8AC3E}">
-        <p14:creationId xmlns:p14="http://schemas.microsoft.com/office/powerpoint/2010/main" val="2010689321"/>
+        <p14:creationId xmlns:p14="http://schemas.microsoft.com/office/powerpoint/2010/main" val="2255061521"/>
       </p:ext>
     </p:extLst>
   </p:cSld>
@@ -12175,7 +12175,7 @@
                           <a:ea typeface="Pretendard SemiBold" pitchFamily="34" charset="-122"/>
                           <a:cs typeface="Pretendard SemiBold" pitchFamily="34" charset="-120"/>
                         </a:rPr>
-                        <a:t>건강기능식품 카테고리 (소비기한 6개월 이상, 필수 기재)</a:t>
+                        <a:t>건강기능식품 카테고리 (미개봉·소비기한 이내, 필수 기재)</a:t>
                       </a:r>
                       <a:endParaRPr lang="en-US" sz="980" dirty="0">
                         <a:latin typeface="Pretendard SemiBold" charset="0"/>
@@ -12747,7 +12747,7 @@
                           <a:ea typeface="Pretendard SemiBold" pitchFamily="34" charset="-122"/>
                           <a:cs typeface="Pretendard SemiBold" pitchFamily="34" charset="-120"/>
                         </a:rPr>
-                        <a:t>6개월 미만·기한 경과로 읽히면 재확인 요청 (자동 차단 안 함)</a:t>
+                        <a:t>기한 경과로 읽히면 재확인 요청 (자동 차단 안 함)</a:t>
                       </a:r>
                       <a:endParaRPr lang="en-US" sz="980" dirty="0">
                         <a:latin typeface="Pretendard SemiBold" charset="0"/>
